--- a/fusion_codir.pptx
+++ b/fusion_codir.pptx
@@ -3398,7 +3398,7 @@
                 </a:solidFill>
                 <a:latin typeface="Calibri"/>
               </a:rPr>
-              <a:t>240</a:t>
+              <a:t>345</a:t>
             </a:r>
           </a:p>
         </p:txBody>
@@ -3468,7 +3468,7 @@
                 </a:solidFill>
                 <a:latin typeface="Calibri"/>
               </a:rPr>
-              <a:t>22</a:t>
+              <a:t>43</a:t>
             </a:r>
           </a:p>
         </p:txBody>
@@ -3538,7 +3538,7 @@
                 </a:solidFill>
                 <a:latin typeface="Calibri"/>
               </a:rPr>
-              <a:t>7.7 M€</a:t>
+              <a:t>15.1 M€</a:t>
             </a:r>
           </a:p>
         </p:txBody>
@@ -4201,7 +4201,7 @@
                 </a:solidFill>
                 <a:latin typeface="Calibri"/>
               </a:rPr>
-              <a:t>38*</a:t>
+              <a:t>143*</a:t>
             </a:r>
           </a:p>
         </p:txBody>
@@ -5742,7 +5742,7 @@
                 </a:solidFill>
                 <a:latin typeface="Calibri"/>
               </a:rPr>
-              <a:t>240</a:t>
+              <a:t>345</a:t>
             </a:r>
           </a:p>
         </p:txBody>
@@ -5777,7 +5777,7 @@
                 </a:solidFill>
                 <a:latin typeface="Calibri"/>
               </a:rPr>
-              <a:t>157 Noriap • 38 Unéal • 45 Ternoveo</a:t>
+              <a:t>157 Noriap • 143 Unéal • 45 Ternoveo</a:t>
             </a:r>
           </a:p>
         </p:txBody>
@@ -5935,7 +5935,7 @@
                 </a:solidFill>
                 <a:latin typeface="Calibri"/>
               </a:rPr>
-              <a:t>22</a:t>
+              <a:t>43</a:t>
             </a:r>
           </a:p>
         </p:txBody>
@@ -5970,7 +5970,7 @@
                 </a:solidFill>
                 <a:latin typeface="Calibri"/>
               </a:rPr>
-              <a:t>8 avec Unéal • 17 avec Ternoveo • 3 sur les deux</a:t>
+              <a:t>34 avec Unéal • 17 avec Ternoveo • 8 sur les deux</a:t>
             </a:r>
           </a:p>
         </p:txBody>
@@ -6128,7 +6128,7 @@
                 </a:solidFill>
                 <a:latin typeface="Calibri"/>
               </a:rPr>
-              <a:t>129 kt</a:t>
+              <a:t>211 kt</a:t>
             </a:r>
           </a:p>
         </p:txBody>
@@ -6163,7 +6163,7 @@
                 </a:solidFill>
                 <a:latin typeface="Calibri"/>
               </a:rPr>
-              <a:t>Soit 12.3% du tonnage R25 total Noriap (1053 kt)</a:t>
+              <a:t>Soit 20.1% du tonnage R25 total Noriap (1053 kt)</a:t>
             </a:r>
           </a:p>
         </p:txBody>
@@ -6321,7 +6321,7 @@
                 </a:solidFill>
                 <a:latin typeface="Calibri"/>
               </a:rPr>
-              <a:t>7.7 M€</a:t>
+              <a:t>15.1 M€</a:t>
             </a:r>
           </a:p>
         </p:txBody>
@@ -6514,7 +6514,7 @@
                 </a:solidFill>
                 <a:latin typeface="Calibri"/>
               </a:rPr>
-              <a:t>3 silos en triple recouvrement</a:t>
+              <a:t>8 silos en triple recouvrement</a:t>
             </a:r>
           </a:p>
         </p:txBody>
@@ -7234,7 +7234,7 @@
                 </a:solidFill>
                 <a:latin typeface="Calibri"/>
               </a:rPr>
-              <a:t>FLEURY</a:t>
+              <a:t>SENALIA NORIAP</a:t>
             </a:r>
           </a:p>
         </p:txBody>
@@ -7269,7 +7269,7 @@
                 </a:solidFill>
                 <a:latin typeface="Calibri"/>
               </a:rPr>
-              <a:t>19 978 t</a:t>
+              <a:t>21 893 t</a:t>
             </a:r>
           </a:p>
         </p:txBody>
@@ -7283,6 +7283,269 @@
         <p:spPr>
           <a:xfrm>
             <a:off x="4937760" y="2084832"/>
+            <a:ext cx="777240" cy="201168"/>
+          </a:xfrm>
+          <a:prstGeom prst="roundRect">
+            <a:avLst/>
+          </a:prstGeom>
+          <a:solidFill>
+            <a:srgbClr val="2CA02C"/>
+          </a:solidFill>
+          <a:ln>
+            <a:noFill/>
+          </a:ln>
+          <a:effectLst/>
+        </p:spPr>
+        <p:style>
+          <a:lnRef idx="1">
+            <a:schemeClr val="accent1"/>
+          </a:lnRef>
+          <a:fillRef idx="3">
+            <a:schemeClr val="accent1"/>
+          </a:fillRef>
+          <a:effectRef idx="2">
+            <a:schemeClr val="accent1"/>
+          </a:effectRef>
+          <a:fontRef idx="minor">
+            <a:schemeClr val="lt1"/>
+          </a:fontRef>
+        </p:style>
+        <p:txBody>
+          <a:bodyPr rtlCol="0" anchor="ctr"/>
+          <a:lstStyle/>
+          <a:p>
+            <a:pPr algn="ctr"/>
+          </a:p>
+        </p:txBody>
+      </p:sp>
+      <p:sp>
+        <p:nvSpPr>
+          <p:cNvPr id="22" name="TextBox 21"/>
+          <p:cNvSpPr txBox="1"/>
+          <p:nvPr/>
+        </p:nvSpPr>
+        <p:spPr>
+          <a:xfrm>
+            <a:off x="4937760" y="2084832"/>
+            <a:ext cx="777240" cy="201168"/>
+          </a:xfrm>
+          <a:prstGeom prst="rect">
+            <a:avLst/>
+          </a:prstGeom>
+          <a:noFill/>
+        </p:spPr>
+        <p:txBody>
+          <a:bodyPr wrap="square" lIns="45720" rIns="45720" anchor="ctr">
+            <a:spAutoFit/>
+          </a:bodyPr>
+          <a:lstStyle/>
+          <a:p>
+            <a:pPr algn="ctr"/>
+            <a:r>
+              <a:rPr sz="900" b="1">
+                <a:solidFill>
+                  <a:srgbClr val="FFFFFF"/>
+                </a:solidFill>
+                <a:latin typeface="Calibri"/>
+              </a:rPr>
+              <a:t>Unéal</a:t>
+            </a:r>
+          </a:p>
+        </p:txBody>
+      </p:sp>
+      <p:sp>
+        <p:nvSpPr>
+          <p:cNvPr id="23" name="TextBox 22"/>
+          <p:cNvSpPr txBox="1"/>
+          <p:nvPr/>
+        </p:nvSpPr>
+        <p:spPr>
+          <a:xfrm>
+            <a:off x="7498079" y="2020824"/>
+            <a:ext cx="2651760" cy="329184"/>
+          </a:xfrm>
+          <a:prstGeom prst="rect">
+            <a:avLst/>
+          </a:prstGeom>
+          <a:noFill/>
+        </p:spPr>
+        <p:txBody>
+          <a:bodyPr wrap="square" lIns="45720" rIns="45720" anchor="ctr">
+            <a:spAutoFit/>
+          </a:bodyPr>
+          <a:lstStyle/>
+          <a:p>
+            <a:pPr algn="l"/>
+            <a:r>
+              <a:rPr sz="1000" b="0">
+                <a:solidFill>
+                  <a:srgbClr val="666666"/>
+                </a:solidFill>
+                <a:latin typeface="Calibri"/>
+              </a:rPr>
+              <a:t>GRAND-COURONNE</a:t>
+            </a:r>
+          </a:p>
+        </p:txBody>
+      </p:sp>
+      <p:sp>
+        <p:nvSpPr>
+          <p:cNvPr id="24" name="TextBox 23"/>
+          <p:cNvSpPr txBox="1"/>
+          <p:nvPr/>
+        </p:nvSpPr>
+        <p:spPr>
+          <a:xfrm>
+            <a:off x="10149840" y="2020824"/>
+            <a:ext cx="1188720" cy="329184"/>
+          </a:xfrm>
+          <a:prstGeom prst="rect">
+            <a:avLst/>
+          </a:prstGeom>
+          <a:noFill/>
+        </p:spPr>
+        <p:txBody>
+          <a:bodyPr wrap="square" lIns="45720" rIns="45720" anchor="ctr">
+            <a:spAutoFit/>
+          </a:bodyPr>
+          <a:lstStyle/>
+          <a:p>
+            <a:pPr algn="l"/>
+            <a:r>
+              <a:rPr sz="1000" b="0">
+                <a:solidFill>
+                  <a:srgbClr val="666666"/>
+                </a:solidFill>
+                <a:latin typeface="Calibri"/>
+              </a:rPr>
+              <a:t>1.72 km</a:t>
+            </a:r>
+          </a:p>
+        </p:txBody>
+      </p:sp>
+      <p:sp>
+        <p:nvSpPr>
+          <p:cNvPr id="25" name="Rectangle 24"/>
+          <p:cNvSpPr/>
+          <p:nvPr/>
+        </p:nvSpPr>
+        <p:spPr>
+          <a:xfrm>
+            <a:off x="457200" y="2350008"/>
+            <a:ext cx="11277295" cy="329184"/>
+          </a:xfrm>
+          <a:prstGeom prst="rect">
+            <a:avLst/>
+          </a:prstGeom>
+          <a:solidFill>
+            <a:srgbClr val="F4F4F6"/>
+          </a:solidFill>
+          <a:ln>
+            <a:noFill/>
+          </a:ln>
+          <a:effectLst/>
+        </p:spPr>
+        <p:style>
+          <a:lnRef idx="1">
+            <a:schemeClr val="accent1"/>
+          </a:lnRef>
+          <a:fillRef idx="3">
+            <a:schemeClr val="accent1"/>
+          </a:fillRef>
+          <a:effectRef idx="2">
+            <a:schemeClr val="accent1"/>
+          </a:effectRef>
+          <a:fontRef idx="minor">
+            <a:schemeClr val="lt1"/>
+          </a:fontRef>
+        </p:style>
+        <p:txBody>
+          <a:bodyPr rtlCol="0" anchor="ctr"/>
+          <a:lstStyle/>
+          <a:p>
+            <a:pPr algn="ctr"/>
+          </a:p>
+        </p:txBody>
+      </p:sp>
+      <p:sp>
+        <p:nvSpPr>
+          <p:cNvPr id="26" name="TextBox 25"/>
+          <p:cNvSpPr txBox="1"/>
+          <p:nvPr/>
+        </p:nvSpPr>
+        <p:spPr>
+          <a:xfrm>
+            <a:off x="548640" y="2350008"/>
+            <a:ext cx="2560320" cy="329184"/>
+          </a:xfrm>
+          <a:prstGeom prst="rect">
+            <a:avLst/>
+          </a:prstGeom>
+          <a:noFill/>
+        </p:spPr>
+        <p:txBody>
+          <a:bodyPr wrap="square" lIns="45720" rIns="45720" anchor="ctr">
+            <a:spAutoFit/>
+          </a:bodyPr>
+          <a:lstStyle/>
+          <a:p>
+            <a:pPr algn="l"/>
+            <a:r>
+              <a:rPr sz="1100" b="1">
+                <a:solidFill>
+                  <a:srgbClr val="1A1A2E"/>
+                </a:solidFill>
+                <a:latin typeface="Calibri"/>
+              </a:rPr>
+              <a:t>FLEURY</a:t>
+            </a:r>
+          </a:p>
+        </p:txBody>
+      </p:sp>
+      <p:sp>
+        <p:nvSpPr>
+          <p:cNvPr id="27" name="TextBox 26"/>
+          <p:cNvSpPr txBox="1"/>
+          <p:nvPr/>
+        </p:nvSpPr>
+        <p:spPr>
+          <a:xfrm>
+            <a:off x="3108960" y="2350008"/>
+            <a:ext cx="1737360" cy="329184"/>
+          </a:xfrm>
+          <a:prstGeom prst="rect">
+            <a:avLst/>
+          </a:prstGeom>
+          <a:noFill/>
+        </p:spPr>
+        <p:txBody>
+          <a:bodyPr wrap="square" lIns="45720" rIns="45720" anchor="ctr">
+            <a:spAutoFit/>
+          </a:bodyPr>
+          <a:lstStyle/>
+          <a:p>
+            <a:pPr algn="l"/>
+            <a:r>
+              <a:rPr sz="1100" b="0">
+                <a:solidFill>
+                  <a:srgbClr val="1A1A2E"/>
+                </a:solidFill>
+                <a:latin typeface="Calibri"/>
+              </a:rPr>
+              <a:t>19 978 t</a:t>
+            </a:r>
+          </a:p>
+        </p:txBody>
+      </p:sp>
+      <p:sp>
+        <p:nvSpPr>
+          <p:cNvPr id="28" name="Rounded Rectangle 27"/>
+          <p:cNvSpPr/>
+          <p:nvPr/>
+        </p:nvSpPr>
+        <p:spPr>
+          <a:xfrm>
+            <a:off x="4937760" y="2414016"/>
             <a:ext cx="777240" cy="201168"/>
           </a:xfrm>
           <a:prstGeom prst="roundRect">
@@ -7320,13 +7583,13 @@
       </p:sp>
       <p:sp>
         <p:nvSpPr>
-          <p:cNvPr id="22" name="TextBox 21"/>
-          <p:cNvSpPr txBox="1"/>
-          <p:nvPr/>
-        </p:nvSpPr>
-        <p:spPr>
-          <a:xfrm>
-            <a:off x="4937760" y="2084832"/>
+          <p:cNvPr id="29" name="TextBox 28"/>
+          <p:cNvSpPr txBox="1"/>
+          <p:nvPr/>
+        </p:nvSpPr>
+        <p:spPr>
+          <a:xfrm>
+            <a:off x="4937760" y="2414016"/>
             <a:ext cx="777240" cy="201168"/>
           </a:xfrm>
           <a:prstGeom prst="rect">
@@ -7355,13 +7618,13 @@
       </p:sp>
       <p:sp>
         <p:nvSpPr>
-          <p:cNvPr id="23" name="TextBox 22"/>
-          <p:cNvSpPr txBox="1"/>
-          <p:nvPr/>
-        </p:nvSpPr>
-        <p:spPr>
-          <a:xfrm>
-            <a:off x="7498079" y="2020824"/>
+          <p:cNvPr id="30" name="TextBox 29"/>
+          <p:cNvSpPr txBox="1"/>
+          <p:nvPr/>
+        </p:nvSpPr>
+        <p:spPr>
+          <a:xfrm>
+            <a:off x="7498079" y="2350008"/>
             <a:ext cx="2651760" cy="329184"/>
           </a:xfrm>
           <a:prstGeom prst="rect">
@@ -7390,13 +7653,13 @@
       </p:sp>
       <p:sp>
         <p:nvSpPr>
-          <p:cNvPr id="24" name="TextBox 23"/>
-          <p:cNvSpPr txBox="1"/>
-          <p:nvPr/>
-        </p:nvSpPr>
-        <p:spPr>
-          <a:xfrm>
-            <a:off x="10149840" y="2020824"/>
+          <p:cNvPr id="31" name="TextBox 30"/>
+          <p:cNvSpPr txBox="1"/>
+          <p:nvPr/>
+        </p:nvSpPr>
+        <p:spPr>
+          <a:xfrm>
+            <a:off x="10149840" y="2350008"/>
             <a:ext cx="1188720" cy="329184"/>
           </a:xfrm>
           <a:prstGeom prst="rect">
@@ -7425,13 +7688,232 @@
       </p:sp>
       <p:sp>
         <p:nvSpPr>
-          <p:cNvPr id="25" name="Rectangle 24"/>
+          <p:cNvPr id="32" name="TextBox 31"/>
+          <p:cNvSpPr txBox="1"/>
+          <p:nvPr/>
+        </p:nvSpPr>
+        <p:spPr>
+          <a:xfrm>
+            <a:off x="548640" y="2679192"/>
+            <a:ext cx="2560320" cy="329184"/>
+          </a:xfrm>
+          <a:prstGeom prst="rect">
+            <a:avLst/>
+          </a:prstGeom>
+          <a:noFill/>
+        </p:spPr>
+        <p:txBody>
+          <a:bodyPr wrap="square" lIns="45720" rIns="45720" anchor="ctr">
+            <a:spAutoFit/>
+          </a:bodyPr>
+          <a:lstStyle/>
+          <a:p>
+            <a:pPr algn="l"/>
+            <a:r>
+              <a:rPr sz="1100" b="1">
+                <a:solidFill>
+                  <a:srgbClr val="1A1A2E"/>
+                </a:solidFill>
+                <a:latin typeface="Calibri"/>
+              </a:rPr>
+              <a:t>MONTDIDIER NORIAP floury</a:t>
+            </a:r>
+          </a:p>
+        </p:txBody>
+      </p:sp>
+      <p:sp>
+        <p:nvSpPr>
+          <p:cNvPr id="33" name="TextBox 32"/>
+          <p:cNvSpPr txBox="1"/>
+          <p:nvPr/>
+        </p:nvSpPr>
+        <p:spPr>
+          <a:xfrm>
+            <a:off x="3108960" y="2679192"/>
+            <a:ext cx="1737360" cy="329184"/>
+          </a:xfrm>
+          <a:prstGeom prst="rect">
+            <a:avLst/>
+          </a:prstGeom>
+          <a:noFill/>
+        </p:spPr>
+        <p:txBody>
+          <a:bodyPr wrap="square" lIns="45720" rIns="45720" anchor="ctr">
+            <a:spAutoFit/>
+          </a:bodyPr>
+          <a:lstStyle/>
+          <a:p>
+            <a:pPr algn="l"/>
+            <a:r>
+              <a:rPr sz="1100" b="0">
+                <a:solidFill>
+                  <a:srgbClr val="1A1A2E"/>
+                </a:solidFill>
+                <a:latin typeface="Calibri"/>
+              </a:rPr>
+              <a:t>12 141 t</a:t>
+            </a:r>
+          </a:p>
+        </p:txBody>
+      </p:sp>
+      <p:sp>
+        <p:nvSpPr>
+          <p:cNvPr id="34" name="Rounded Rectangle 33"/>
           <p:cNvSpPr/>
           <p:nvPr/>
         </p:nvSpPr>
         <p:spPr>
           <a:xfrm>
-            <a:off x="457200" y="2350008"/>
+            <a:off x="4937760" y="2743200"/>
+            <a:ext cx="777240" cy="201168"/>
+          </a:xfrm>
+          <a:prstGeom prst="roundRect">
+            <a:avLst/>
+          </a:prstGeom>
+          <a:solidFill>
+            <a:srgbClr val="1F77B4"/>
+          </a:solidFill>
+          <a:ln>
+            <a:noFill/>
+          </a:ln>
+          <a:effectLst/>
+        </p:spPr>
+        <p:style>
+          <a:lnRef idx="1">
+            <a:schemeClr val="accent1"/>
+          </a:lnRef>
+          <a:fillRef idx="3">
+            <a:schemeClr val="accent1"/>
+          </a:fillRef>
+          <a:effectRef idx="2">
+            <a:schemeClr val="accent1"/>
+          </a:effectRef>
+          <a:fontRef idx="minor">
+            <a:schemeClr val="lt1"/>
+          </a:fontRef>
+        </p:style>
+        <p:txBody>
+          <a:bodyPr rtlCol="0" anchor="ctr"/>
+          <a:lstStyle/>
+          <a:p>
+            <a:pPr algn="ctr"/>
+          </a:p>
+        </p:txBody>
+      </p:sp>
+      <p:sp>
+        <p:nvSpPr>
+          <p:cNvPr id="35" name="TextBox 34"/>
+          <p:cNvSpPr txBox="1"/>
+          <p:nvPr/>
+        </p:nvSpPr>
+        <p:spPr>
+          <a:xfrm>
+            <a:off x="4937760" y="2743200"/>
+            <a:ext cx="777240" cy="201168"/>
+          </a:xfrm>
+          <a:prstGeom prst="rect">
+            <a:avLst/>
+          </a:prstGeom>
+          <a:noFill/>
+        </p:spPr>
+        <p:txBody>
+          <a:bodyPr wrap="square" lIns="45720" rIns="45720" anchor="ctr">
+            <a:spAutoFit/>
+          </a:bodyPr>
+          <a:lstStyle/>
+          <a:p>
+            <a:pPr algn="ctr"/>
+            <a:r>
+              <a:rPr sz="900" b="1">
+                <a:solidFill>
+                  <a:srgbClr val="FFFFFF"/>
+                </a:solidFill>
+                <a:latin typeface="Calibri"/>
+              </a:rPr>
+              <a:t>Ternoveo</a:t>
+            </a:r>
+          </a:p>
+        </p:txBody>
+      </p:sp>
+      <p:sp>
+        <p:nvSpPr>
+          <p:cNvPr id="36" name="TextBox 35"/>
+          <p:cNvSpPr txBox="1"/>
+          <p:nvPr/>
+        </p:nvSpPr>
+        <p:spPr>
+          <a:xfrm>
+            <a:off x="7498079" y="2679192"/>
+            <a:ext cx="2651760" cy="329184"/>
+          </a:xfrm>
+          <a:prstGeom prst="rect">
+            <a:avLst/>
+          </a:prstGeom>
+          <a:noFill/>
+        </p:spPr>
+        <p:txBody>
+          <a:bodyPr wrap="square" lIns="45720" rIns="45720" anchor="ctr">
+            <a:spAutoFit/>
+          </a:bodyPr>
+          <a:lstStyle/>
+          <a:p>
+            <a:pPr algn="l"/>
+            <a:r>
+              <a:rPr sz="1000" b="0">
+                <a:solidFill>
+                  <a:srgbClr val="666666"/>
+                </a:solidFill>
+                <a:latin typeface="Calibri"/>
+              </a:rPr>
+              <a:t>MONTDIDIER</a:t>
+            </a:r>
+          </a:p>
+        </p:txBody>
+      </p:sp>
+      <p:sp>
+        <p:nvSpPr>
+          <p:cNvPr id="37" name="TextBox 36"/>
+          <p:cNvSpPr txBox="1"/>
+          <p:nvPr/>
+        </p:nvSpPr>
+        <p:spPr>
+          <a:xfrm>
+            <a:off x="10149840" y="2679192"/>
+            <a:ext cx="1188720" cy="329184"/>
+          </a:xfrm>
+          <a:prstGeom prst="rect">
+            <a:avLst/>
+          </a:prstGeom>
+          <a:noFill/>
+        </p:spPr>
+        <p:txBody>
+          <a:bodyPr wrap="square" lIns="45720" rIns="45720" anchor="ctr">
+            <a:spAutoFit/>
+          </a:bodyPr>
+          <a:lstStyle/>
+          <a:p>
+            <a:pPr algn="l"/>
+            <a:r>
+              <a:rPr sz="1000" b="0">
+                <a:solidFill>
+                  <a:srgbClr val="666666"/>
+                </a:solidFill>
+                <a:latin typeface="Calibri"/>
+              </a:rPr>
+              <a:t>1.46 km</a:t>
+            </a:r>
+          </a:p>
+        </p:txBody>
+      </p:sp>
+      <p:sp>
+        <p:nvSpPr>
+          <p:cNvPr id="38" name="Rectangle 37"/>
+          <p:cNvSpPr/>
+          <p:nvPr/>
+        </p:nvSpPr>
+        <p:spPr>
+          <a:xfrm>
+            <a:off x="457200" y="3008376"/>
             <a:ext cx="11277295" cy="329184"/>
           </a:xfrm>
           <a:prstGeom prst="rect">
@@ -7469,13 +7951,13 @@
       </p:sp>
       <p:sp>
         <p:nvSpPr>
-          <p:cNvPr id="26" name="TextBox 25"/>
-          <p:cNvSpPr txBox="1"/>
-          <p:nvPr/>
-        </p:nvSpPr>
-        <p:spPr>
-          <a:xfrm>
-            <a:off x="548640" y="2350008"/>
+          <p:cNvPr id="39" name="TextBox 38"/>
+          <p:cNvSpPr txBox="1"/>
+          <p:nvPr/>
+        </p:nvSpPr>
+        <p:spPr>
+          <a:xfrm>
+            <a:off x="548640" y="3008376"/>
             <a:ext cx="2560320" cy="329184"/>
           </a:xfrm>
           <a:prstGeom prst="rect">
@@ -7497,20 +7979,20 @@
                 </a:solidFill>
                 <a:latin typeface="Calibri"/>
               </a:rPr>
-              <a:t>MONTDIDIER NORIAP floury</a:t>
-            </a:r>
-          </a:p>
-        </p:txBody>
-      </p:sp>
-      <p:sp>
-        <p:nvSpPr>
-          <p:cNvPr id="27" name="TextBox 26"/>
-          <p:cNvSpPr txBox="1"/>
-          <p:nvPr/>
-        </p:nvSpPr>
-        <p:spPr>
-          <a:xfrm>
-            <a:off x="3108960" y="2350008"/>
+              <a:t>POIX</a:t>
+            </a:r>
+          </a:p>
+        </p:txBody>
+      </p:sp>
+      <p:sp>
+        <p:nvSpPr>
+          <p:cNvPr id="40" name="TextBox 39"/>
+          <p:cNvSpPr txBox="1"/>
+          <p:nvPr/>
+        </p:nvSpPr>
+        <p:spPr>
+          <a:xfrm>
+            <a:off x="3108960" y="3008376"/>
             <a:ext cx="1737360" cy="329184"/>
           </a:xfrm>
           <a:prstGeom prst="rect">
@@ -7532,20 +8014,20 @@
                 </a:solidFill>
                 <a:latin typeface="Calibri"/>
               </a:rPr>
-              <a:t>12 141 t</a:t>
-            </a:r>
-          </a:p>
-        </p:txBody>
-      </p:sp>
-      <p:sp>
-        <p:nvSpPr>
-          <p:cNvPr id="28" name="Rounded Rectangle 27"/>
+              <a:t>11 190 t</a:t>
+            </a:r>
+          </a:p>
+        </p:txBody>
+      </p:sp>
+      <p:sp>
+        <p:nvSpPr>
+          <p:cNvPr id="41" name="Rounded Rectangle 40"/>
           <p:cNvSpPr/>
           <p:nvPr/>
         </p:nvSpPr>
         <p:spPr>
           <a:xfrm>
-            <a:off x="4937760" y="2414016"/>
+            <a:off x="4937760" y="3072384"/>
             <a:ext cx="777240" cy="201168"/>
           </a:xfrm>
           <a:prstGeom prst="roundRect">
@@ -7583,13 +8065,13 @@
       </p:sp>
       <p:sp>
         <p:nvSpPr>
-          <p:cNvPr id="29" name="TextBox 28"/>
-          <p:cNvSpPr txBox="1"/>
-          <p:nvPr/>
-        </p:nvSpPr>
-        <p:spPr>
-          <a:xfrm>
-            <a:off x="4937760" y="2414016"/>
+          <p:cNvPr id="42" name="TextBox 41"/>
+          <p:cNvSpPr txBox="1"/>
+          <p:nvPr/>
+        </p:nvSpPr>
+        <p:spPr>
+          <a:xfrm>
+            <a:off x="4937760" y="3072384"/>
             <a:ext cx="777240" cy="201168"/>
           </a:xfrm>
           <a:prstGeom prst="rect">
@@ -7618,13 +8100,13 @@
       </p:sp>
       <p:sp>
         <p:nvSpPr>
-          <p:cNvPr id="30" name="TextBox 29"/>
-          <p:cNvSpPr txBox="1"/>
-          <p:nvPr/>
-        </p:nvSpPr>
-        <p:spPr>
-          <a:xfrm>
-            <a:off x="7498079" y="2350008"/>
+          <p:cNvPr id="43" name="TextBox 42"/>
+          <p:cNvSpPr txBox="1"/>
+          <p:nvPr/>
+        </p:nvSpPr>
+        <p:spPr>
+          <a:xfrm>
+            <a:off x="7498079" y="3008376"/>
             <a:ext cx="2651760" cy="329184"/>
           </a:xfrm>
           <a:prstGeom prst="rect">
@@ -7646,20 +8128,20 @@
                 </a:solidFill>
                 <a:latin typeface="Calibri"/>
               </a:rPr>
-              <a:t>MONTDIDIER</a:t>
-            </a:r>
-          </a:p>
-        </p:txBody>
-      </p:sp>
-      <p:sp>
-        <p:nvSpPr>
-          <p:cNvPr id="31" name="TextBox 30"/>
-          <p:cNvSpPr txBox="1"/>
-          <p:nvPr/>
-        </p:nvSpPr>
-        <p:spPr>
-          <a:xfrm>
-            <a:off x="10149840" y="2350008"/>
+              <a:t>BRASSY</a:t>
+            </a:r>
+          </a:p>
+        </p:txBody>
+      </p:sp>
+      <p:sp>
+        <p:nvSpPr>
+          <p:cNvPr id="44" name="TextBox 43"/>
+          <p:cNvSpPr txBox="1"/>
+          <p:nvPr/>
+        </p:nvSpPr>
+        <p:spPr>
+          <a:xfrm>
+            <a:off x="10149840" y="3008376"/>
             <a:ext cx="1188720" cy="329184"/>
           </a:xfrm>
           <a:prstGeom prst="rect">
@@ -7681,20 +8163,20 @@
                 </a:solidFill>
                 <a:latin typeface="Calibri"/>
               </a:rPr>
-              <a:t>1.46 km</a:t>
-            </a:r>
-          </a:p>
-        </p:txBody>
-      </p:sp>
-      <p:sp>
-        <p:nvSpPr>
-          <p:cNvPr id="32" name="TextBox 31"/>
-          <p:cNvSpPr txBox="1"/>
-          <p:nvPr/>
-        </p:nvSpPr>
-        <p:spPr>
-          <a:xfrm>
-            <a:off x="548640" y="2679192"/>
+              <a:t>6.42 km</a:t>
+            </a:r>
+          </a:p>
+        </p:txBody>
+      </p:sp>
+      <p:sp>
+        <p:nvSpPr>
+          <p:cNvPr id="45" name="TextBox 44"/>
+          <p:cNvSpPr txBox="1"/>
+          <p:nvPr/>
+        </p:nvSpPr>
+        <p:spPr>
+          <a:xfrm>
+            <a:off x="548640" y="3337560"/>
             <a:ext cx="2560320" cy="329184"/>
           </a:xfrm>
           <a:prstGeom prst="rect">
@@ -7716,20 +8198,20 @@
                 </a:solidFill>
                 <a:latin typeface="Calibri"/>
               </a:rPr>
-              <a:t>POIX</a:t>
-            </a:r>
-          </a:p>
-        </p:txBody>
-      </p:sp>
-      <p:sp>
-        <p:nvSpPr>
-          <p:cNvPr id="33" name="TextBox 32"/>
-          <p:cNvSpPr txBox="1"/>
-          <p:nvPr/>
-        </p:nvSpPr>
-        <p:spPr>
-          <a:xfrm>
-            <a:off x="3108960" y="2679192"/>
+              <a:t>MARQUISE</a:t>
+            </a:r>
+          </a:p>
+        </p:txBody>
+      </p:sp>
+      <p:sp>
+        <p:nvSpPr>
+          <p:cNvPr id="46" name="TextBox 45"/>
+          <p:cNvSpPr txBox="1"/>
+          <p:nvPr/>
+        </p:nvSpPr>
+        <p:spPr>
+          <a:xfrm>
+            <a:off x="3108960" y="3337560"/>
             <a:ext cx="1737360" cy="329184"/>
           </a:xfrm>
           <a:prstGeom prst="rect">
@@ -7751,20 +8233,1729 @@
                 </a:solidFill>
                 <a:latin typeface="Calibri"/>
               </a:rPr>
-              <a:t>11 190 t</a:t>
-            </a:r>
-          </a:p>
-        </p:txBody>
-      </p:sp>
-      <p:sp>
-        <p:nvSpPr>
-          <p:cNvPr id="34" name="Rounded Rectangle 33"/>
+              <a:t>11 050 t</a:t>
+            </a:r>
+          </a:p>
+        </p:txBody>
+      </p:sp>
+      <p:sp>
+        <p:nvSpPr>
+          <p:cNvPr id="47" name="Rounded Rectangle 46"/>
           <p:cNvSpPr/>
           <p:nvPr/>
         </p:nvSpPr>
         <p:spPr>
           <a:xfrm>
-            <a:off x="4937760" y="2743200"/>
+            <a:off x="4937760" y="3401568"/>
+            <a:ext cx="777240" cy="201168"/>
+          </a:xfrm>
+          <a:prstGeom prst="roundRect">
+            <a:avLst/>
+          </a:prstGeom>
+          <a:solidFill>
+            <a:srgbClr val="2CA02C"/>
+          </a:solidFill>
+          <a:ln>
+            <a:noFill/>
+          </a:ln>
+          <a:effectLst/>
+        </p:spPr>
+        <p:style>
+          <a:lnRef idx="1">
+            <a:schemeClr val="accent1"/>
+          </a:lnRef>
+          <a:fillRef idx="3">
+            <a:schemeClr val="accent1"/>
+          </a:fillRef>
+          <a:effectRef idx="2">
+            <a:schemeClr val="accent1"/>
+          </a:effectRef>
+          <a:fontRef idx="minor">
+            <a:schemeClr val="lt1"/>
+          </a:fontRef>
+        </p:style>
+        <p:txBody>
+          <a:bodyPr rtlCol="0" anchor="ctr"/>
+          <a:lstStyle/>
+          <a:p>
+            <a:pPr algn="ctr"/>
+          </a:p>
+        </p:txBody>
+      </p:sp>
+      <p:sp>
+        <p:nvSpPr>
+          <p:cNvPr id="48" name="TextBox 47"/>
+          <p:cNvSpPr txBox="1"/>
+          <p:nvPr/>
+        </p:nvSpPr>
+        <p:spPr>
+          <a:xfrm>
+            <a:off x="4937760" y="3401568"/>
+            <a:ext cx="777240" cy="201168"/>
+          </a:xfrm>
+          <a:prstGeom prst="rect">
+            <a:avLst/>
+          </a:prstGeom>
+          <a:noFill/>
+        </p:spPr>
+        <p:txBody>
+          <a:bodyPr wrap="square" lIns="45720" rIns="45720" anchor="ctr">
+            <a:spAutoFit/>
+          </a:bodyPr>
+          <a:lstStyle/>
+          <a:p>
+            <a:pPr algn="ctr"/>
+            <a:r>
+              <a:rPr sz="900" b="1">
+                <a:solidFill>
+                  <a:srgbClr val="FFFFFF"/>
+                </a:solidFill>
+                <a:latin typeface="Calibri"/>
+              </a:rPr>
+              <a:t>Unéal</a:t>
+            </a:r>
+          </a:p>
+        </p:txBody>
+      </p:sp>
+      <p:sp>
+        <p:nvSpPr>
+          <p:cNvPr id="49" name="TextBox 48"/>
+          <p:cNvSpPr txBox="1"/>
+          <p:nvPr/>
+        </p:nvSpPr>
+        <p:spPr>
+          <a:xfrm>
+            <a:off x="7498079" y="3337560"/>
+            <a:ext cx="2651760" cy="329184"/>
+          </a:xfrm>
+          <a:prstGeom prst="rect">
+            <a:avLst/>
+          </a:prstGeom>
+          <a:noFill/>
+        </p:spPr>
+        <p:txBody>
+          <a:bodyPr wrap="square" lIns="45720" rIns="45720" anchor="ctr">
+            <a:spAutoFit/>
+          </a:bodyPr>
+          <a:lstStyle/>
+          <a:p>
+            <a:pPr algn="l"/>
+            <a:r>
+              <a:rPr sz="1000" b="0">
+                <a:solidFill>
+                  <a:srgbClr val="666666"/>
+                </a:solidFill>
+                <a:latin typeface="Calibri"/>
+              </a:rPr>
+              <a:t>MARQUISE</a:t>
+            </a:r>
+          </a:p>
+        </p:txBody>
+      </p:sp>
+      <p:sp>
+        <p:nvSpPr>
+          <p:cNvPr id="50" name="TextBox 49"/>
+          <p:cNvSpPr txBox="1"/>
+          <p:nvPr/>
+        </p:nvSpPr>
+        <p:spPr>
+          <a:xfrm>
+            <a:off x="10149840" y="3337560"/>
+            <a:ext cx="1188720" cy="329184"/>
+          </a:xfrm>
+          <a:prstGeom prst="rect">
+            <a:avLst/>
+          </a:prstGeom>
+          <a:noFill/>
+        </p:spPr>
+        <p:txBody>
+          <a:bodyPr wrap="square" lIns="45720" rIns="45720" anchor="ctr">
+            <a:spAutoFit/>
+          </a:bodyPr>
+          <a:lstStyle/>
+          <a:p>
+            <a:pPr algn="l"/>
+            <a:r>
+              <a:rPr sz="1000" b="0">
+                <a:solidFill>
+                  <a:srgbClr val="666666"/>
+                </a:solidFill>
+                <a:latin typeface="Calibri"/>
+              </a:rPr>
+              <a:t>1.11 km</a:t>
+            </a:r>
+          </a:p>
+        </p:txBody>
+      </p:sp>
+      <p:sp>
+        <p:nvSpPr>
+          <p:cNvPr id="51" name="Rectangle 50"/>
+          <p:cNvSpPr/>
+          <p:nvPr/>
+        </p:nvSpPr>
+        <p:spPr>
+          <a:xfrm>
+            <a:off x="457200" y="3666744"/>
+            <a:ext cx="11277295" cy="329184"/>
+          </a:xfrm>
+          <a:prstGeom prst="rect">
+            <a:avLst/>
+          </a:prstGeom>
+          <a:solidFill>
+            <a:srgbClr val="F4F4F6"/>
+          </a:solidFill>
+          <a:ln>
+            <a:noFill/>
+          </a:ln>
+          <a:effectLst/>
+        </p:spPr>
+        <p:style>
+          <a:lnRef idx="1">
+            <a:schemeClr val="accent1"/>
+          </a:lnRef>
+          <a:fillRef idx="3">
+            <a:schemeClr val="accent1"/>
+          </a:fillRef>
+          <a:effectRef idx="2">
+            <a:schemeClr val="accent1"/>
+          </a:effectRef>
+          <a:fontRef idx="minor">
+            <a:schemeClr val="lt1"/>
+          </a:fontRef>
+        </p:style>
+        <p:txBody>
+          <a:bodyPr rtlCol="0" anchor="ctr"/>
+          <a:lstStyle/>
+          <a:p>
+            <a:pPr algn="ctr"/>
+          </a:p>
+        </p:txBody>
+      </p:sp>
+      <p:sp>
+        <p:nvSpPr>
+          <p:cNvPr id="52" name="TextBox 51"/>
+          <p:cNvSpPr txBox="1"/>
+          <p:nvPr/>
+        </p:nvSpPr>
+        <p:spPr>
+          <a:xfrm>
+            <a:off x="548640" y="3666744"/>
+            <a:ext cx="2560320" cy="329184"/>
+          </a:xfrm>
+          <a:prstGeom prst="rect">
+            <a:avLst/>
+          </a:prstGeom>
+          <a:noFill/>
+        </p:spPr>
+        <p:txBody>
+          <a:bodyPr wrap="square" lIns="45720" rIns="45720" anchor="ctr">
+            <a:spAutoFit/>
+          </a:bodyPr>
+          <a:lstStyle/>
+          <a:p>
+            <a:pPr algn="l"/>
+            <a:r>
+              <a:rPr sz="1100" b="1">
+                <a:solidFill>
+                  <a:srgbClr val="1A1A2E"/>
+                </a:solidFill>
+                <a:latin typeface="Calibri"/>
+              </a:rPr>
+              <a:t>AVESNES LES BAPAUME</a:t>
+            </a:r>
+          </a:p>
+        </p:txBody>
+      </p:sp>
+      <p:sp>
+        <p:nvSpPr>
+          <p:cNvPr id="53" name="TextBox 52"/>
+          <p:cNvSpPr txBox="1"/>
+          <p:nvPr/>
+        </p:nvSpPr>
+        <p:spPr>
+          <a:xfrm>
+            <a:off x="3108960" y="3666744"/>
+            <a:ext cx="1737360" cy="329184"/>
+          </a:xfrm>
+          <a:prstGeom prst="rect">
+            <a:avLst/>
+          </a:prstGeom>
+          <a:noFill/>
+        </p:spPr>
+        <p:txBody>
+          <a:bodyPr wrap="square" lIns="45720" rIns="45720" anchor="ctr">
+            <a:spAutoFit/>
+          </a:bodyPr>
+          <a:lstStyle/>
+          <a:p>
+            <a:pPr algn="l"/>
+            <a:r>
+              <a:rPr sz="1100" b="0">
+                <a:solidFill>
+                  <a:srgbClr val="1A1A2E"/>
+                </a:solidFill>
+                <a:latin typeface="Calibri"/>
+              </a:rPr>
+              <a:t>9 921 t</a:t>
+            </a:r>
+          </a:p>
+        </p:txBody>
+      </p:sp>
+      <p:sp>
+        <p:nvSpPr>
+          <p:cNvPr id="54" name="Rounded Rectangle 53"/>
+          <p:cNvSpPr/>
+          <p:nvPr/>
+        </p:nvSpPr>
+        <p:spPr>
+          <a:xfrm>
+            <a:off x="4937760" y="3730752"/>
+            <a:ext cx="777240" cy="201168"/>
+          </a:xfrm>
+          <a:prstGeom prst="roundRect">
+            <a:avLst/>
+          </a:prstGeom>
+          <a:solidFill>
+            <a:srgbClr val="9C27B0"/>
+          </a:solidFill>
+          <a:ln>
+            <a:noFill/>
+          </a:ln>
+          <a:effectLst/>
+        </p:spPr>
+        <p:style>
+          <a:lnRef idx="1">
+            <a:schemeClr val="accent1"/>
+          </a:lnRef>
+          <a:fillRef idx="3">
+            <a:schemeClr val="accent1"/>
+          </a:fillRef>
+          <a:effectRef idx="2">
+            <a:schemeClr val="accent1"/>
+          </a:effectRef>
+          <a:fontRef idx="minor">
+            <a:schemeClr val="lt1"/>
+          </a:fontRef>
+        </p:style>
+        <p:txBody>
+          <a:bodyPr rtlCol="0" anchor="ctr"/>
+          <a:lstStyle/>
+          <a:p>
+            <a:pPr algn="ctr"/>
+          </a:p>
+        </p:txBody>
+      </p:sp>
+      <p:sp>
+        <p:nvSpPr>
+          <p:cNvPr id="55" name="TextBox 54"/>
+          <p:cNvSpPr txBox="1"/>
+          <p:nvPr/>
+        </p:nvSpPr>
+        <p:spPr>
+          <a:xfrm>
+            <a:off x="4937760" y="3730752"/>
+            <a:ext cx="777240" cy="201168"/>
+          </a:xfrm>
+          <a:prstGeom prst="rect">
+            <a:avLst/>
+          </a:prstGeom>
+          <a:noFill/>
+        </p:spPr>
+        <p:txBody>
+          <a:bodyPr wrap="square" lIns="45720" rIns="45720" anchor="ctr">
+            <a:spAutoFit/>
+          </a:bodyPr>
+          <a:lstStyle/>
+          <a:p>
+            <a:pPr algn="ctr"/>
+            <a:r>
+              <a:rPr sz="900" b="1">
+                <a:solidFill>
+                  <a:srgbClr val="FFFFFF"/>
+                </a:solidFill>
+                <a:latin typeface="Calibri"/>
+              </a:rPr>
+              <a:t>U + T</a:t>
+            </a:r>
+          </a:p>
+        </p:txBody>
+      </p:sp>
+      <p:sp>
+        <p:nvSpPr>
+          <p:cNvPr id="56" name="TextBox 55"/>
+          <p:cNvSpPr txBox="1"/>
+          <p:nvPr/>
+        </p:nvSpPr>
+        <p:spPr>
+          <a:xfrm>
+            <a:off x="7498079" y="3666744"/>
+            <a:ext cx="2651760" cy="329184"/>
+          </a:xfrm>
+          <a:prstGeom prst="rect">
+            <a:avLst/>
+          </a:prstGeom>
+          <a:noFill/>
+        </p:spPr>
+        <p:txBody>
+          <a:bodyPr wrap="square" lIns="45720" rIns="45720" anchor="ctr">
+            <a:spAutoFit/>
+          </a:bodyPr>
+          <a:lstStyle/>
+          <a:p>
+            <a:pPr algn="l"/>
+            <a:r>
+              <a:rPr sz="1000" b="0">
+                <a:solidFill>
+                  <a:srgbClr val="666666"/>
+                </a:solidFill>
+                <a:latin typeface="Calibri"/>
+              </a:rPr>
+              <a:t>AVESNES-LES-BAPAUME / ACHIET-LE-PETIT</a:t>
+            </a:r>
+          </a:p>
+        </p:txBody>
+      </p:sp>
+      <p:sp>
+        <p:nvSpPr>
+          <p:cNvPr id="57" name="TextBox 56"/>
+          <p:cNvSpPr txBox="1"/>
+          <p:nvPr/>
+        </p:nvSpPr>
+        <p:spPr>
+          <a:xfrm>
+            <a:off x="10149840" y="3666744"/>
+            <a:ext cx="1188720" cy="329184"/>
+          </a:xfrm>
+          <a:prstGeom prst="rect">
+            <a:avLst/>
+          </a:prstGeom>
+          <a:noFill/>
+        </p:spPr>
+        <p:txBody>
+          <a:bodyPr wrap="square" lIns="45720" rIns="45720" anchor="ctr">
+            <a:spAutoFit/>
+          </a:bodyPr>
+          <a:lstStyle/>
+          <a:p>
+            <a:pPr algn="l"/>
+            <a:r>
+              <a:rPr sz="1000" b="0">
+                <a:solidFill>
+                  <a:srgbClr val="666666"/>
+                </a:solidFill>
+                <a:latin typeface="Calibri"/>
+              </a:rPr>
+              <a:t>0.94 / 6.37 km</a:t>
+            </a:r>
+          </a:p>
+        </p:txBody>
+      </p:sp>
+      <p:sp>
+        <p:nvSpPr>
+          <p:cNvPr id="58" name="TextBox 57"/>
+          <p:cNvSpPr txBox="1"/>
+          <p:nvPr/>
+        </p:nvSpPr>
+        <p:spPr>
+          <a:xfrm>
+            <a:off x="548640" y="3995928"/>
+            <a:ext cx="2560320" cy="329184"/>
+          </a:xfrm>
+          <a:prstGeom prst="rect">
+            <a:avLst/>
+          </a:prstGeom>
+          <a:noFill/>
+        </p:spPr>
+        <p:txBody>
+          <a:bodyPr wrap="square" lIns="45720" rIns="45720" anchor="ctr">
+            <a:spAutoFit/>
+          </a:bodyPr>
+          <a:lstStyle/>
+          <a:p>
+            <a:pPr algn="l"/>
+            <a:r>
+              <a:rPr sz="1100" b="1">
+                <a:solidFill>
+                  <a:srgbClr val="1A1A2E"/>
+                </a:solidFill>
+                <a:latin typeface="Calibri"/>
+              </a:rPr>
+              <a:t>NOYELLES EN CHAUSSEE</a:t>
+            </a:r>
+          </a:p>
+        </p:txBody>
+      </p:sp>
+      <p:sp>
+        <p:nvSpPr>
+          <p:cNvPr id="59" name="TextBox 58"/>
+          <p:cNvSpPr txBox="1"/>
+          <p:nvPr/>
+        </p:nvSpPr>
+        <p:spPr>
+          <a:xfrm>
+            <a:off x="3108960" y="3995928"/>
+            <a:ext cx="1737360" cy="329184"/>
+          </a:xfrm>
+          <a:prstGeom prst="rect">
+            <a:avLst/>
+          </a:prstGeom>
+          <a:noFill/>
+        </p:spPr>
+        <p:txBody>
+          <a:bodyPr wrap="square" lIns="45720" rIns="45720" anchor="ctr">
+            <a:spAutoFit/>
+          </a:bodyPr>
+          <a:lstStyle/>
+          <a:p>
+            <a:pPr algn="l"/>
+            <a:r>
+              <a:rPr sz="1100" b="0">
+                <a:solidFill>
+                  <a:srgbClr val="1A1A2E"/>
+                </a:solidFill>
+                <a:latin typeface="Calibri"/>
+              </a:rPr>
+              <a:t>9 662 t</a:t>
+            </a:r>
+          </a:p>
+        </p:txBody>
+      </p:sp>
+      <p:sp>
+        <p:nvSpPr>
+          <p:cNvPr id="60" name="Rounded Rectangle 59"/>
+          <p:cNvSpPr/>
+          <p:nvPr/>
+        </p:nvSpPr>
+        <p:spPr>
+          <a:xfrm>
+            <a:off x="4937760" y="4059936"/>
+            <a:ext cx="777240" cy="201168"/>
+          </a:xfrm>
+          <a:prstGeom prst="roundRect">
+            <a:avLst/>
+          </a:prstGeom>
+          <a:solidFill>
+            <a:srgbClr val="2CA02C"/>
+          </a:solidFill>
+          <a:ln>
+            <a:noFill/>
+          </a:ln>
+          <a:effectLst/>
+        </p:spPr>
+        <p:style>
+          <a:lnRef idx="1">
+            <a:schemeClr val="accent1"/>
+          </a:lnRef>
+          <a:fillRef idx="3">
+            <a:schemeClr val="accent1"/>
+          </a:fillRef>
+          <a:effectRef idx="2">
+            <a:schemeClr val="accent1"/>
+          </a:effectRef>
+          <a:fontRef idx="minor">
+            <a:schemeClr val="lt1"/>
+          </a:fontRef>
+        </p:style>
+        <p:txBody>
+          <a:bodyPr rtlCol="0" anchor="ctr"/>
+          <a:lstStyle/>
+          <a:p>
+            <a:pPr algn="ctr"/>
+          </a:p>
+        </p:txBody>
+      </p:sp>
+      <p:sp>
+        <p:nvSpPr>
+          <p:cNvPr id="61" name="TextBox 60"/>
+          <p:cNvSpPr txBox="1"/>
+          <p:nvPr/>
+        </p:nvSpPr>
+        <p:spPr>
+          <a:xfrm>
+            <a:off x="4937760" y="4059936"/>
+            <a:ext cx="777240" cy="201168"/>
+          </a:xfrm>
+          <a:prstGeom prst="rect">
+            <a:avLst/>
+          </a:prstGeom>
+          <a:noFill/>
+        </p:spPr>
+        <p:txBody>
+          <a:bodyPr wrap="square" lIns="45720" rIns="45720" anchor="ctr">
+            <a:spAutoFit/>
+          </a:bodyPr>
+          <a:lstStyle/>
+          <a:p>
+            <a:pPr algn="ctr"/>
+            <a:r>
+              <a:rPr sz="900" b="1">
+                <a:solidFill>
+                  <a:srgbClr val="FFFFFF"/>
+                </a:solidFill>
+                <a:latin typeface="Calibri"/>
+              </a:rPr>
+              <a:t>Unéal</a:t>
+            </a:r>
+          </a:p>
+        </p:txBody>
+      </p:sp>
+      <p:sp>
+        <p:nvSpPr>
+          <p:cNvPr id="62" name="TextBox 61"/>
+          <p:cNvSpPr txBox="1"/>
+          <p:nvPr/>
+        </p:nvSpPr>
+        <p:spPr>
+          <a:xfrm>
+            <a:off x="7498079" y="3995928"/>
+            <a:ext cx="2651760" cy="329184"/>
+          </a:xfrm>
+          <a:prstGeom prst="rect">
+            <a:avLst/>
+          </a:prstGeom>
+          <a:noFill/>
+        </p:spPr>
+        <p:txBody>
+          <a:bodyPr wrap="square" lIns="45720" rIns="45720" anchor="ctr">
+            <a:spAutoFit/>
+          </a:bodyPr>
+          <a:lstStyle/>
+          <a:p>
+            <a:pPr algn="l"/>
+            <a:r>
+              <a:rPr sz="1000" b="0">
+                <a:solidFill>
+                  <a:srgbClr val="666666"/>
+                </a:solidFill>
+                <a:latin typeface="Calibri"/>
+              </a:rPr>
+              <a:t>GUESCHART</a:t>
+            </a:r>
+          </a:p>
+        </p:txBody>
+      </p:sp>
+      <p:sp>
+        <p:nvSpPr>
+          <p:cNvPr id="63" name="TextBox 62"/>
+          <p:cNvSpPr txBox="1"/>
+          <p:nvPr/>
+        </p:nvSpPr>
+        <p:spPr>
+          <a:xfrm>
+            <a:off x="10149840" y="3995928"/>
+            <a:ext cx="1188720" cy="329184"/>
+          </a:xfrm>
+          <a:prstGeom prst="rect">
+            <a:avLst/>
+          </a:prstGeom>
+          <a:noFill/>
+        </p:spPr>
+        <p:txBody>
+          <a:bodyPr wrap="square" lIns="45720" rIns="45720" anchor="ctr">
+            <a:spAutoFit/>
+          </a:bodyPr>
+          <a:lstStyle/>
+          <a:p>
+            <a:pPr algn="l"/>
+            <a:r>
+              <a:rPr sz="1000" b="0">
+                <a:solidFill>
+                  <a:srgbClr val="666666"/>
+                </a:solidFill>
+                <a:latin typeface="Calibri"/>
+              </a:rPr>
+              <a:t>4.02 km</a:t>
+            </a:r>
+          </a:p>
+        </p:txBody>
+      </p:sp>
+      <p:sp>
+        <p:nvSpPr>
+          <p:cNvPr id="64" name="Rectangle 63"/>
+          <p:cNvSpPr/>
+          <p:nvPr/>
+        </p:nvSpPr>
+        <p:spPr>
+          <a:xfrm>
+            <a:off x="457200" y="4325112"/>
+            <a:ext cx="11277295" cy="329184"/>
+          </a:xfrm>
+          <a:prstGeom prst="rect">
+            <a:avLst/>
+          </a:prstGeom>
+          <a:solidFill>
+            <a:srgbClr val="F4F4F6"/>
+          </a:solidFill>
+          <a:ln>
+            <a:noFill/>
+          </a:ln>
+          <a:effectLst/>
+        </p:spPr>
+        <p:style>
+          <a:lnRef idx="1">
+            <a:schemeClr val="accent1"/>
+          </a:lnRef>
+          <a:fillRef idx="3">
+            <a:schemeClr val="accent1"/>
+          </a:fillRef>
+          <a:effectRef idx="2">
+            <a:schemeClr val="accent1"/>
+          </a:effectRef>
+          <a:fontRef idx="minor">
+            <a:schemeClr val="lt1"/>
+          </a:fontRef>
+        </p:style>
+        <p:txBody>
+          <a:bodyPr rtlCol="0" anchor="ctr"/>
+          <a:lstStyle/>
+          <a:p>
+            <a:pPr algn="ctr"/>
+          </a:p>
+        </p:txBody>
+      </p:sp>
+      <p:sp>
+        <p:nvSpPr>
+          <p:cNvPr id="65" name="TextBox 64"/>
+          <p:cNvSpPr txBox="1"/>
+          <p:nvPr/>
+        </p:nvSpPr>
+        <p:spPr>
+          <a:xfrm>
+            <a:off x="548640" y="4325112"/>
+            <a:ext cx="2560320" cy="329184"/>
+          </a:xfrm>
+          <a:prstGeom prst="rect">
+            <a:avLst/>
+          </a:prstGeom>
+          <a:noFill/>
+        </p:spPr>
+        <p:txBody>
+          <a:bodyPr wrap="square" lIns="45720" rIns="45720" anchor="ctr">
+            <a:spAutoFit/>
+          </a:bodyPr>
+          <a:lstStyle/>
+          <a:p>
+            <a:pPr algn="l"/>
+            <a:r>
+              <a:rPr sz="1100" b="1">
+                <a:solidFill>
+                  <a:srgbClr val="1A1A2E"/>
+                </a:solidFill>
+                <a:latin typeface="Calibri"/>
+              </a:rPr>
+              <a:t>LA NEUVILLE</a:t>
+            </a:r>
+          </a:p>
+        </p:txBody>
+      </p:sp>
+      <p:sp>
+        <p:nvSpPr>
+          <p:cNvPr id="66" name="TextBox 65"/>
+          <p:cNvSpPr txBox="1"/>
+          <p:nvPr/>
+        </p:nvSpPr>
+        <p:spPr>
+          <a:xfrm>
+            <a:off x="3108960" y="4325112"/>
+            <a:ext cx="1737360" cy="329184"/>
+          </a:xfrm>
+          <a:prstGeom prst="rect">
+            <a:avLst/>
+          </a:prstGeom>
+          <a:noFill/>
+        </p:spPr>
+        <p:txBody>
+          <a:bodyPr wrap="square" lIns="45720" rIns="45720" anchor="ctr">
+            <a:spAutoFit/>
+          </a:bodyPr>
+          <a:lstStyle/>
+          <a:p>
+            <a:pPr algn="l"/>
+            <a:r>
+              <a:rPr sz="1100" b="0">
+                <a:solidFill>
+                  <a:srgbClr val="1A1A2E"/>
+                </a:solidFill>
+                <a:latin typeface="Calibri"/>
+              </a:rPr>
+              <a:t>9 617 t</a:t>
+            </a:r>
+          </a:p>
+        </p:txBody>
+      </p:sp>
+      <p:sp>
+        <p:nvSpPr>
+          <p:cNvPr id="67" name="Rounded Rectangle 66"/>
+          <p:cNvSpPr/>
+          <p:nvPr/>
+        </p:nvSpPr>
+        <p:spPr>
+          <a:xfrm>
+            <a:off x="4937760" y="4389120"/>
+            <a:ext cx="777240" cy="201168"/>
+          </a:xfrm>
+          <a:prstGeom prst="roundRect">
+            <a:avLst/>
+          </a:prstGeom>
+          <a:solidFill>
+            <a:srgbClr val="9C27B0"/>
+          </a:solidFill>
+          <a:ln>
+            <a:noFill/>
+          </a:ln>
+          <a:effectLst/>
+        </p:spPr>
+        <p:style>
+          <a:lnRef idx="1">
+            <a:schemeClr val="accent1"/>
+          </a:lnRef>
+          <a:fillRef idx="3">
+            <a:schemeClr val="accent1"/>
+          </a:fillRef>
+          <a:effectRef idx="2">
+            <a:schemeClr val="accent1"/>
+          </a:effectRef>
+          <a:fontRef idx="minor">
+            <a:schemeClr val="lt1"/>
+          </a:fontRef>
+        </p:style>
+        <p:txBody>
+          <a:bodyPr rtlCol="0" anchor="ctr"/>
+          <a:lstStyle/>
+          <a:p>
+            <a:pPr algn="ctr"/>
+          </a:p>
+        </p:txBody>
+      </p:sp>
+      <p:sp>
+        <p:nvSpPr>
+          <p:cNvPr id="68" name="TextBox 67"/>
+          <p:cNvSpPr txBox="1"/>
+          <p:nvPr/>
+        </p:nvSpPr>
+        <p:spPr>
+          <a:xfrm>
+            <a:off x="4937760" y="4389120"/>
+            <a:ext cx="777240" cy="201168"/>
+          </a:xfrm>
+          <a:prstGeom prst="rect">
+            <a:avLst/>
+          </a:prstGeom>
+          <a:noFill/>
+        </p:spPr>
+        <p:txBody>
+          <a:bodyPr wrap="square" lIns="45720" rIns="45720" anchor="ctr">
+            <a:spAutoFit/>
+          </a:bodyPr>
+          <a:lstStyle/>
+          <a:p>
+            <a:pPr algn="ctr"/>
+            <a:r>
+              <a:rPr sz="900" b="1">
+                <a:solidFill>
+                  <a:srgbClr val="FFFFFF"/>
+                </a:solidFill>
+                <a:latin typeface="Calibri"/>
+              </a:rPr>
+              <a:t>U + T</a:t>
+            </a:r>
+          </a:p>
+        </p:txBody>
+      </p:sp>
+      <p:sp>
+        <p:nvSpPr>
+          <p:cNvPr id="69" name="TextBox 68"/>
+          <p:cNvSpPr txBox="1"/>
+          <p:nvPr/>
+        </p:nvSpPr>
+        <p:spPr>
+          <a:xfrm>
+            <a:off x="7498079" y="4325112"/>
+            <a:ext cx="2651760" cy="329184"/>
+          </a:xfrm>
+          <a:prstGeom prst="rect">
+            <a:avLst/>
+          </a:prstGeom>
+          <a:noFill/>
+        </p:spPr>
+        <p:txBody>
+          <a:bodyPr wrap="square" lIns="45720" rIns="45720" anchor="ctr">
+            <a:spAutoFit/>
+          </a:bodyPr>
+          <a:lstStyle/>
+          <a:p>
+            <a:pPr algn="l"/>
+            <a:r>
+              <a:rPr sz="1000" b="0">
+                <a:solidFill>
+                  <a:srgbClr val="666666"/>
+                </a:solidFill>
+                <a:latin typeface="Calibri"/>
+              </a:rPr>
+              <a:t>LA NEUVILLE-LES-BRAY / DOMPIERRE-BECQUINCOURT</a:t>
+            </a:r>
+          </a:p>
+        </p:txBody>
+      </p:sp>
+      <p:sp>
+        <p:nvSpPr>
+          <p:cNvPr id="70" name="TextBox 69"/>
+          <p:cNvSpPr txBox="1"/>
+          <p:nvPr/>
+        </p:nvSpPr>
+        <p:spPr>
+          <a:xfrm>
+            <a:off x="10149840" y="4325112"/>
+            <a:ext cx="1188720" cy="329184"/>
+          </a:xfrm>
+          <a:prstGeom prst="rect">
+            <a:avLst/>
+          </a:prstGeom>
+          <a:noFill/>
+        </p:spPr>
+        <p:txBody>
+          <a:bodyPr wrap="square" lIns="45720" rIns="45720" anchor="ctr">
+            <a:spAutoFit/>
+          </a:bodyPr>
+          <a:lstStyle/>
+          <a:p>
+            <a:pPr algn="l"/>
+            <a:r>
+              <a:rPr sz="1000" b="0">
+                <a:solidFill>
+                  <a:srgbClr val="666666"/>
+                </a:solidFill>
+                <a:latin typeface="Calibri"/>
+              </a:rPr>
+              <a:t>3.04 / 4.8 km</a:t>
+            </a:r>
+          </a:p>
+        </p:txBody>
+      </p:sp>
+      <p:sp>
+        <p:nvSpPr>
+          <p:cNvPr id="71" name="TextBox 70"/>
+          <p:cNvSpPr txBox="1"/>
+          <p:nvPr/>
+        </p:nvSpPr>
+        <p:spPr>
+          <a:xfrm>
+            <a:off x="548640" y="4654296"/>
+            <a:ext cx="2560320" cy="329184"/>
+          </a:xfrm>
+          <a:prstGeom prst="rect">
+            <a:avLst/>
+          </a:prstGeom>
+          <a:noFill/>
+        </p:spPr>
+        <p:txBody>
+          <a:bodyPr wrap="square" lIns="45720" rIns="45720" anchor="ctr">
+            <a:spAutoFit/>
+          </a:bodyPr>
+          <a:lstStyle/>
+          <a:p>
+            <a:pPr algn="l"/>
+            <a:r>
+              <a:rPr sz="1100" b="1">
+                <a:solidFill>
+                  <a:srgbClr val="1A1A2E"/>
+                </a:solidFill>
+                <a:latin typeface="Calibri"/>
+              </a:rPr>
+              <a:t>HOLQUE</a:t>
+            </a:r>
+          </a:p>
+        </p:txBody>
+      </p:sp>
+      <p:sp>
+        <p:nvSpPr>
+          <p:cNvPr id="72" name="TextBox 71"/>
+          <p:cNvSpPr txBox="1"/>
+          <p:nvPr/>
+        </p:nvSpPr>
+        <p:spPr>
+          <a:xfrm>
+            <a:off x="3108960" y="4654296"/>
+            <a:ext cx="1737360" cy="329184"/>
+          </a:xfrm>
+          <a:prstGeom prst="rect">
+            <a:avLst/>
+          </a:prstGeom>
+          <a:noFill/>
+        </p:spPr>
+        <p:txBody>
+          <a:bodyPr wrap="square" lIns="45720" rIns="45720" anchor="ctr">
+            <a:spAutoFit/>
+          </a:bodyPr>
+          <a:lstStyle/>
+          <a:p>
+            <a:pPr algn="l"/>
+            <a:r>
+              <a:rPr sz="1100" b="0">
+                <a:solidFill>
+                  <a:srgbClr val="1A1A2E"/>
+                </a:solidFill>
+                <a:latin typeface="Calibri"/>
+              </a:rPr>
+              <a:t>6 870 t</a:t>
+            </a:r>
+          </a:p>
+        </p:txBody>
+      </p:sp>
+      <p:sp>
+        <p:nvSpPr>
+          <p:cNvPr id="73" name="Rounded Rectangle 72"/>
+          <p:cNvSpPr/>
+          <p:nvPr/>
+        </p:nvSpPr>
+        <p:spPr>
+          <a:xfrm>
+            <a:off x="4937760" y="4718304"/>
+            <a:ext cx="777240" cy="201168"/>
+          </a:xfrm>
+          <a:prstGeom prst="roundRect">
+            <a:avLst/>
+          </a:prstGeom>
+          <a:solidFill>
+            <a:srgbClr val="2CA02C"/>
+          </a:solidFill>
+          <a:ln>
+            <a:noFill/>
+          </a:ln>
+          <a:effectLst/>
+        </p:spPr>
+        <p:style>
+          <a:lnRef idx="1">
+            <a:schemeClr val="accent1"/>
+          </a:lnRef>
+          <a:fillRef idx="3">
+            <a:schemeClr val="accent1"/>
+          </a:fillRef>
+          <a:effectRef idx="2">
+            <a:schemeClr val="accent1"/>
+          </a:effectRef>
+          <a:fontRef idx="minor">
+            <a:schemeClr val="lt1"/>
+          </a:fontRef>
+        </p:style>
+        <p:txBody>
+          <a:bodyPr rtlCol="0" anchor="ctr"/>
+          <a:lstStyle/>
+          <a:p>
+            <a:pPr algn="ctr"/>
+          </a:p>
+        </p:txBody>
+      </p:sp>
+      <p:sp>
+        <p:nvSpPr>
+          <p:cNvPr id="74" name="TextBox 73"/>
+          <p:cNvSpPr txBox="1"/>
+          <p:nvPr/>
+        </p:nvSpPr>
+        <p:spPr>
+          <a:xfrm>
+            <a:off x="4937760" y="4718304"/>
+            <a:ext cx="777240" cy="201168"/>
+          </a:xfrm>
+          <a:prstGeom prst="rect">
+            <a:avLst/>
+          </a:prstGeom>
+          <a:noFill/>
+        </p:spPr>
+        <p:txBody>
+          <a:bodyPr wrap="square" lIns="45720" rIns="45720" anchor="ctr">
+            <a:spAutoFit/>
+          </a:bodyPr>
+          <a:lstStyle/>
+          <a:p>
+            <a:pPr algn="ctr"/>
+            <a:r>
+              <a:rPr sz="900" b="1">
+                <a:solidFill>
+                  <a:srgbClr val="FFFFFF"/>
+                </a:solidFill>
+                <a:latin typeface="Calibri"/>
+              </a:rPr>
+              <a:t>Unéal</a:t>
+            </a:r>
+          </a:p>
+        </p:txBody>
+      </p:sp>
+      <p:sp>
+        <p:nvSpPr>
+          <p:cNvPr id="75" name="TextBox 74"/>
+          <p:cNvSpPr txBox="1"/>
+          <p:nvPr/>
+        </p:nvSpPr>
+        <p:spPr>
+          <a:xfrm>
+            <a:off x="7498079" y="4654296"/>
+            <a:ext cx="2651760" cy="329184"/>
+          </a:xfrm>
+          <a:prstGeom prst="rect">
+            <a:avLst/>
+          </a:prstGeom>
+          <a:noFill/>
+        </p:spPr>
+        <p:txBody>
+          <a:bodyPr wrap="square" lIns="45720" rIns="45720" anchor="ctr">
+            <a:spAutoFit/>
+          </a:bodyPr>
+          <a:lstStyle/>
+          <a:p>
+            <a:pPr algn="l"/>
+            <a:r>
+              <a:rPr sz="1000" b="0">
+                <a:solidFill>
+                  <a:srgbClr val="666666"/>
+                </a:solidFill>
+                <a:latin typeface="Calibri"/>
+              </a:rPr>
+              <a:t>CAPPELLE-BROUCK</a:t>
+            </a:r>
+          </a:p>
+        </p:txBody>
+      </p:sp>
+      <p:sp>
+        <p:nvSpPr>
+          <p:cNvPr id="76" name="TextBox 75"/>
+          <p:cNvSpPr txBox="1"/>
+          <p:nvPr/>
+        </p:nvSpPr>
+        <p:spPr>
+          <a:xfrm>
+            <a:off x="10149840" y="4654296"/>
+            <a:ext cx="1188720" cy="329184"/>
+          </a:xfrm>
+          <a:prstGeom prst="rect">
+            <a:avLst/>
+          </a:prstGeom>
+          <a:noFill/>
+        </p:spPr>
+        <p:txBody>
+          <a:bodyPr wrap="square" lIns="45720" rIns="45720" anchor="ctr">
+            <a:spAutoFit/>
+          </a:bodyPr>
+          <a:lstStyle/>
+          <a:p>
+            <a:pPr algn="l"/>
+            <a:r>
+              <a:rPr sz="1000" b="0">
+                <a:solidFill>
+                  <a:srgbClr val="666666"/>
+                </a:solidFill>
+                <a:latin typeface="Calibri"/>
+              </a:rPr>
+              <a:t>5.51 km</a:t>
+            </a:r>
+          </a:p>
+        </p:txBody>
+      </p:sp>
+      <p:sp>
+        <p:nvSpPr>
+          <p:cNvPr id="77" name="Rectangle 76"/>
+          <p:cNvSpPr/>
+          <p:nvPr/>
+        </p:nvSpPr>
+        <p:spPr>
+          <a:xfrm>
+            <a:off x="457200" y="4983480"/>
+            <a:ext cx="11277295" cy="329184"/>
+          </a:xfrm>
+          <a:prstGeom prst="rect">
+            <a:avLst/>
+          </a:prstGeom>
+          <a:solidFill>
+            <a:srgbClr val="F4F4F6"/>
+          </a:solidFill>
+          <a:ln>
+            <a:noFill/>
+          </a:ln>
+          <a:effectLst/>
+        </p:spPr>
+        <p:style>
+          <a:lnRef idx="1">
+            <a:schemeClr val="accent1"/>
+          </a:lnRef>
+          <a:fillRef idx="3">
+            <a:schemeClr val="accent1"/>
+          </a:fillRef>
+          <a:effectRef idx="2">
+            <a:schemeClr val="accent1"/>
+          </a:effectRef>
+          <a:fontRef idx="minor">
+            <a:schemeClr val="lt1"/>
+          </a:fontRef>
+        </p:style>
+        <p:txBody>
+          <a:bodyPr rtlCol="0" anchor="ctr"/>
+          <a:lstStyle/>
+          <a:p>
+            <a:pPr algn="ctr"/>
+          </a:p>
+        </p:txBody>
+      </p:sp>
+      <p:sp>
+        <p:nvSpPr>
+          <p:cNvPr id="78" name="TextBox 77"/>
+          <p:cNvSpPr txBox="1"/>
+          <p:nvPr/>
+        </p:nvSpPr>
+        <p:spPr>
+          <a:xfrm>
+            <a:off x="548640" y="4983480"/>
+            <a:ext cx="2560320" cy="329184"/>
+          </a:xfrm>
+          <a:prstGeom prst="rect">
+            <a:avLst/>
+          </a:prstGeom>
+          <a:noFill/>
+        </p:spPr>
+        <p:txBody>
+          <a:bodyPr wrap="square" lIns="45720" rIns="45720" anchor="ctr">
+            <a:spAutoFit/>
+          </a:bodyPr>
+          <a:lstStyle/>
+          <a:p>
+            <a:pPr algn="l"/>
+            <a:r>
+              <a:rPr sz="1100" b="1">
+                <a:solidFill>
+                  <a:srgbClr val="1A1A2E"/>
+                </a:solidFill>
+                <a:latin typeface="Calibri"/>
+              </a:rPr>
+              <a:t>PIHEM</a:t>
+            </a:r>
+          </a:p>
+        </p:txBody>
+      </p:sp>
+      <p:sp>
+        <p:nvSpPr>
+          <p:cNvPr id="79" name="TextBox 78"/>
+          <p:cNvSpPr txBox="1"/>
+          <p:nvPr/>
+        </p:nvSpPr>
+        <p:spPr>
+          <a:xfrm>
+            <a:off x="3108960" y="4983480"/>
+            <a:ext cx="1737360" cy="329184"/>
+          </a:xfrm>
+          <a:prstGeom prst="rect">
+            <a:avLst/>
+          </a:prstGeom>
+          <a:noFill/>
+        </p:spPr>
+        <p:txBody>
+          <a:bodyPr wrap="square" lIns="45720" rIns="45720" anchor="ctr">
+            <a:spAutoFit/>
+          </a:bodyPr>
+          <a:lstStyle/>
+          <a:p>
+            <a:pPr algn="l"/>
+            <a:r>
+              <a:rPr sz="1100" b="0">
+                <a:solidFill>
+                  <a:srgbClr val="1A1A2E"/>
+                </a:solidFill>
+                <a:latin typeface="Calibri"/>
+              </a:rPr>
+              <a:t>6 611 t</a:t>
+            </a:r>
+          </a:p>
+        </p:txBody>
+      </p:sp>
+      <p:sp>
+        <p:nvSpPr>
+          <p:cNvPr id="80" name="Rounded Rectangle 79"/>
+          <p:cNvSpPr/>
+          <p:nvPr/>
+        </p:nvSpPr>
+        <p:spPr>
+          <a:xfrm>
+            <a:off x="4937760" y="5047488"/>
+            <a:ext cx="777240" cy="201168"/>
+          </a:xfrm>
+          <a:prstGeom prst="roundRect">
+            <a:avLst/>
+          </a:prstGeom>
+          <a:solidFill>
+            <a:srgbClr val="9C27B0"/>
+          </a:solidFill>
+          <a:ln>
+            <a:noFill/>
+          </a:ln>
+          <a:effectLst/>
+        </p:spPr>
+        <p:style>
+          <a:lnRef idx="1">
+            <a:schemeClr val="accent1"/>
+          </a:lnRef>
+          <a:fillRef idx="3">
+            <a:schemeClr val="accent1"/>
+          </a:fillRef>
+          <a:effectRef idx="2">
+            <a:schemeClr val="accent1"/>
+          </a:effectRef>
+          <a:fontRef idx="minor">
+            <a:schemeClr val="lt1"/>
+          </a:fontRef>
+        </p:style>
+        <p:txBody>
+          <a:bodyPr rtlCol="0" anchor="ctr"/>
+          <a:lstStyle/>
+          <a:p>
+            <a:pPr algn="ctr"/>
+          </a:p>
+        </p:txBody>
+      </p:sp>
+      <p:sp>
+        <p:nvSpPr>
+          <p:cNvPr id="81" name="TextBox 80"/>
+          <p:cNvSpPr txBox="1"/>
+          <p:nvPr/>
+        </p:nvSpPr>
+        <p:spPr>
+          <a:xfrm>
+            <a:off x="4937760" y="5047488"/>
+            <a:ext cx="777240" cy="201168"/>
+          </a:xfrm>
+          <a:prstGeom prst="rect">
+            <a:avLst/>
+          </a:prstGeom>
+          <a:noFill/>
+        </p:spPr>
+        <p:txBody>
+          <a:bodyPr wrap="square" lIns="45720" rIns="45720" anchor="ctr">
+            <a:spAutoFit/>
+          </a:bodyPr>
+          <a:lstStyle/>
+          <a:p>
+            <a:pPr algn="ctr"/>
+            <a:r>
+              <a:rPr sz="900" b="1">
+                <a:solidFill>
+                  <a:srgbClr val="FFFFFF"/>
+                </a:solidFill>
+                <a:latin typeface="Calibri"/>
+              </a:rPr>
+              <a:t>U + T</a:t>
+            </a:r>
+          </a:p>
+        </p:txBody>
+      </p:sp>
+      <p:sp>
+        <p:nvSpPr>
+          <p:cNvPr id="82" name="TextBox 81"/>
+          <p:cNvSpPr txBox="1"/>
+          <p:nvPr/>
+        </p:nvSpPr>
+        <p:spPr>
+          <a:xfrm>
+            <a:off x="7498079" y="4983480"/>
+            <a:ext cx="2651760" cy="329184"/>
+          </a:xfrm>
+          <a:prstGeom prst="rect">
+            <a:avLst/>
+          </a:prstGeom>
+          <a:noFill/>
+        </p:spPr>
+        <p:txBody>
+          <a:bodyPr wrap="square" lIns="45720" rIns="45720" anchor="ctr">
+            <a:spAutoFit/>
+          </a:bodyPr>
+          <a:lstStyle/>
+          <a:p>
+            <a:pPr algn="l"/>
+            <a:r>
+              <a:rPr sz="1000" b="0">
+                <a:solidFill>
+                  <a:srgbClr val="666666"/>
+                </a:solidFill>
+                <a:latin typeface="Calibri"/>
+              </a:rPr>
+              <a:t>DELETTES / THEROUANNE</a:t>
+            </a:r>
+          </a:p>
+        </p:txBody>
+      </p:sp>
+      <p:sp>
+        <p:nvSpPr>
+          <p:cNvPr id="83" name="TextBox 82"/>
+          <p:cNvSpPr txBox="1"/>
+          <p:nvPr/>
+        </p:nvSpPr>
+        <p:spPr>
+          <a:xfrm>
+            <a:off x="10149840" y="4983480"/>
+            <a:ext cx="1188720" cy="329184"/>
+          </a:xfrm>
+          <a:prstGeom prst="rect">
+            <a:avLst/>
+          </a:prstGeom>
+          <a:noFill/>
+        </p:spPr>
+        <p:txBody>
+          <a:bodyPr wrap="square" lIns="45720" rIns="45720" anchor="ctr">
+            <a:spAutoFit/>
+          </a:bodyPr>
+          <a:lstStyle/>
+          <a:p>
+            <a:pPr algn="l"/>
+            <a:r>
+              <a:rPr sz="1000" b="0">
+                <a:solidFill>
+                  <a:srgbClr val="666666"/>
+                </a:solidFill>
+                <a:latin typeface="Calibri"/>
+              </a:rPr>
+              <a:t>4.99 / 6.36 km</a:t>
+            </a:r>
+          </a:p>
+        </p:txBody>
+      </p:sp>
+      <p:sp>
+        <p:nvSpPr>
+          <p:cNvPr id="84" name="TextBox 83"/>
+          <p:cNvSpPr txBox="1"/>
+          <p:nvPr/>
+        </p:nvSpPr>
+        <p:spPr>
+          <a:xfrm>
+            <a:off x="548640" y="5312664"/>
+            <a:ext cx="2560320" cy="329184"/>
+          </a:xfrm>
+          <a:prstGeom prst="rect">
+            <a:avLst/>
+          </a:prstGeom>
+          <a:noFill/>
+        </p:spPr>
+        <p:txBody>
+          <a:bodyPr wrap="square" lIns="45720" rIns="45720" anchor="ctr">
+            <a:spAutoFit/>
+          </a:bodyPr>
+          <a:lstStyle/>
+          <a:p>
+            <a:pPr algn="l"/>
+            <a:r>
+              <a:rPr sz="1100" b="1">
+                <a:solidFill>
+                  <a:srgbClr val="1A1A2E"/>
+                </a:solidFill>
+                <a:latin typeface="Calibri"/>
+              </a:rPr>
+              <a:t>SOCX</a:t>
+            </a:r>
+          </a:p>
+        </p:txBody>
+      </p:sp>
+      <p:sp>
+        <p:nvSpPr>
+          <p:cNvPr id="85" name="TextBox 84"/>
+          <p:cNvSpPr txBox="1"/>
+          <p:nvPr/>
+        </p:nvSpPr>
+        <p:spPr>
+          <a:xfrm>
+            <a:off x="3108960" y="5312664"/>
+            <a:ext cx="1737360" cy="329184"/>
+          </a:xfrm>
+          <a:prstGeom prst="rect">
+            <a:avLst/>
+          </a:prstGeom>
+          <a:noFill/>
+        </p:spPr>
+        <p:txBody>
+          <a:bodyPr wrap="square" lIns="45720" rIns="45720" anchor="ctr">
+            <a:spAutoFit/>
+          </a:bodyPr>
+          <a:lstStyle/>
+          <a:p>
+            <a:pPr algn="l"/>
+            <a:r>
+              <a:rPr sz="1100" b="0">
+                <a:solidFill>
+                  <a:srgbClr val="1A1A2E"/>
+                </a:solidFill>
+                <a:latin typeface="Calibri"/>
+              </a:rPr>
+              <a:t>6 074 t</a:t>
+            </a:r>
+          </a:p>
+        </p:txBody>
+      </p:sp>
+      <p:sp>
+        <p:nvSpPr>
+          <p:cNvPr id="86" name="Rounded Rectangle 85"/>
+          <p:cNvSpPr/>
+          <p:nvPr/>
+        </p:nvSpPr>
+        <p:spPr>
+          <a:xfrm>
+            <a:off x="4937760" y="5376672"/>
+            <a:ext cx="777240" cy="201168"/>
+          </a:xfrm>
+          <a:prstGeom prst="roundRect">
+            <a:avLst/>
+          </a:prstGeom>
+          <a:solidFill>
+            <a:srgbClr val="9C27B0"/>
+          </a:solidFill>
+          <a:ln>
+            <a:noFill/>
+          </a:ln>
+          <a:effectLst/>
+        </p:spPr>
+        <p:style>
+          <a:lnRef idx="1">
+            <a:schemeClr val="accent1"/>
+          </a:lnRef>
+          <a:fillRef idx="3">
+            <a:schemeClr val="accent1"/>
+          </a:fillRef>
+          <a:effectRef idx="2">
+            <a:schemeClr val="accent1"/>
+          </a:effectRef>
+          <a:fontRef idx="minor">
+            <a:schemeClr val="lt1"/>
+          </a:fontRef>
+        </p:style>
+        <p:txBody>
+          <a:bodyPr rtlCol="0" anchor="ctr"/>
+          <a:lstStyle/>
+          <a:p>
+            <a:pPr algn="ctr"/>
+          </a:p>
+        </p:txBody>
+      </p:sp>
+      <p:sp>
+        <p:nvSpPr>
+          <p:cNvPr id="87" name="TextBox 86"/>
+          <p:cNvSpPr txBox="1"/>
+          <p:nvPr/>
+        </p:nvSpPr>
+        <p:spPr>
+          <a:xfrm>
+            <a:off x="4937760" y="5376672"/>
+            <a:ext cx="777240" cy="201168"/>
+          </a:xfrm>
+          <a:prstGeom prst="rect">
+            <a:avLst/>
+          </a:prstGeom>
+          <a:noFill/>
+        </p:spPr>
+        <p:txBody>
+          <a:bodyPr wrap="square" lIns="45720" rIns="45720" anchor="ctr">
+            <a:spAutoFit/>
+          </a:bodyPr>
+          <a:lstStyle/>
+          <a:p>
+            <a:pPr algn="ctr"/>
+            <a:r>
+              <a:rPr sz="900" b="1">
+                <a:solidFill>
+                  <a:srgbClr val="FFFFFF"/>
+                </a:solidFill>
+                <a:latin typeface="Calibri"/>
+              </a:rPr>
+              <a:t>U + T</a:t>
+            </a:r>
+          </a:p>
+        </p:txBody>
+      </p:sp>
+      <p:sp>
+        <p:nvSpPr>
+          <p:cNvPr id="88" name="TextBox 87"/>
+          <p:cNvSpPr txBox="1"/>
+          <p:nvPr/>
+        </p:nvSpPr>
+        <p:spPr>
+          <a:xfrm>
+            <a:off x="7498079" y="5312664"/>
+            <a:ext cx="2651760" cy="329184"/>
+          </a:xfrm>
+          <a:prstGeom prst="rect">
+            <a:avLst/>
+          </a:prstGeom>
+          <a:noFill/>
+        </p:spPr>
+        <p:txBody>
+          <a:bodyPr wrap="square" lIns="45720" rIns="45720" anchor="ctr">
+            <a:spAutoFit/>
+          </a:bodyPr>
+          <a:lstStyle/>
+          <a:p>
+            <a:pPr algn="l"/>
+            <a:r>
+              <a:rPr sz="1000" b="0">
+                <a:solidFill>
+                  <a:srgbClr val="666666"/>
+                </a:solidFill>
+                <a:latin typeface="Calibri"/>
+              </a:rPr>
+              <a:t>ESQUELBECQ / BIERNE</a:t>
+            </a:r>
+          </a:p>
+        </p:txBody>
+      </p:sp>
+      <p:sp>
+        <p:nvSpPr>
+          <p:cNvPr id="89" name="TextBox 88"/>
+          <p:cNvSpPr txBox="1"/>
+          <p:nvPr/>
+        </p:nvSpPr>
+        <p:spPr>
+          <a:xfrm>
+            <a:off x="10149840" y="5312664"/>
+            <a:ext cx="1188720" cy="329184"/>
+          </a:xfrm>
+          <a:prstGeom prst="rect">
+            <a:avLst/>
+          </a:prstGeom>
+          <a:noFill/>
+        </p:spPr>
+        <p:txBody>
+          <a:bodyPr wrap="square" lIns="45720" rIns="45720" anchor="ctr">
+            <a:spAutoFit/>
+          </a:bodyPr>
+          <a:lstStyle/>
+          <a:p>
+            <a:pPr algn="l"/>
+            <a:r>
+              <a:rPr sz="1000" b="0">
+                <a:solidFill>
+                  <a:srgbClr val="666666"/>
+                </a:solidFill>
+                <a:latin typeface="Calibri"/>
+              </a:rPr>
+              <a:t>6.69 / 2.08 km</a:t>
+            </a:r>
+          </a:p>
+        </p:txBody>
+      </p:sp>
+      <p:sp>
+        <p:nvSpPr>
+          <p:cNvPr id="90" name="Rectangle 89"/>
+          <p:cNvSpPr/>
+          <p:nvPr/>
+        </p:nvSpPr>
+        <p:spPr>
+          <a:xfrm>
+            <a:off x="457200" y="5641848"/>
+            <a:ext cx="11277295" cy="329184"/>
+          </a:xfrm>
+          <a:prstGeom prst="rect">
+            <a:avLst/>
+          </a:prstGeom>
+          <a:solidFill>
+            <a:srgbClr val="F4F4F6"/>
+          </a:solidFill>
+          <a:ln>
+            <a:noFill/>
+          </a:ln>
+          <a:effectLst/>
+        </p:spPr>
+        <p:style>
+          <a:lnRef idx="1">
+            <a:schemeClr val="accent1"/>
+          </a:lnRef>
+          <a:fillRef idx="3">
+            <a:schemeClr val="accent1"/>
+          </a:fillRef>
+          <a:effectRef idx="2">
+            <a:schemeClr val="accent1"/>
+          </a:effectRef>
+          <a:fontRef idx="minor">
+            <a:schemeClr val="lt1"/>
+          </a:fontRef>
+        </p:style>
+        <p:txBody>
+          <a:bodyPr rtlCol="0" anchor="ctr"/>
+          <a:lstStyle/>
+          <a:p>
+            <a:pPr algn="ctr"/>
+          </a:p>
+        </p:txBody>
+      </p:sp>
+      <p:sp>
+        <p:nvSpPr>
+          <p:cNvPr id="91" name="TextBox 90"/>
+          <p:cNvSpPr txBox="1"/>
+          <p:nvPr/>
+        </p:nvSpPr>
+        <p:spPr>
+          <a:xfrm>
+            <a:off x="548640" y="5641848"/>
+            <a:ext cx="2560320" cy="329184"/>
+          </a:xfrm>
+          <a:prstGeom prst="rect">
+            <a:avLst/>
+          </a:prstGeom>
+          <a:noFill/>
+        </p:spPr>
+        <p:txBody>
+          <a:bodyPr wrap="square" lIns="45720" rIns="45720" anchor="ctr">
+            <a:spAutoFit/>
+          </a:bodyPr>
+          <a:lstStyle/>
+          <a:p>
+            <a:pPr algn="l"/>
+            <a:r>
+              <a:rPr sz="1100" b="1">
+                <a:solidFill>
+                  <a:srgbClr val="1A1A2E"/>
+                </a:solidFill>
+                <a:latin typeface="Calibri"/>
+              </a:rPr>
+              <a:t>BEAUDEDUIT PLAINE</a:t>
+            </a:r>
+          </a:p>
+        </p:txBody>
+      </p:sp>
+      <p:sp>
+        <p:nvSpPr>
+          <p:cNvPr id="92" name="TextBox 91"/>
+          <p:cNvSpPr txBox="1"/>
+          <p:nvPr/>
+        </p:nvSpPr>
+        <p:spPr>
+          <a:xfrm>
+            <a:off x="3108960" y="5641848"/>
+            <a:ext cx="1737360" cy="329184"/>
+          </a:xfrm>
+          <a:prstGeom prst="rect">
+            <a:avLst/>
+          </a:prstGeom>
+          <a:noFill/>
+        </p:spPr>
+        <p:txBody>
+          <a:bodyPr wrap="square" lIns="45720" rIns="45720" anchor="ctr">
+            <a:spAutoFit/>
+          </a:bodyPr>
+          <a:lstStyle/>
+          <a:p>
+            <a:pPr algn="l"/>
+            <a:r>
+              <a:rPr sz="1100" b="0">
+                <a:solidFill>
+                  <a:srgbClr val="1A1A2E"/>
+                </a:solidFill>
+                <a:latin typeface="Calibri"/>
+              </a:rPr>
+              <a:t>6 052 t</a:t>
+            </a:r>
+          </a:p>
+        </p:txBody>
+      </p:sp>
+      <p:sp>
+        <p:nvSpPr>
+          <p:cNvPr id="93" name="Rounded Rectangle 92"/>
+          <p:cNvSpPr/>
+          <p:nvPr/>
+        </p:nvSpPr>
+        <p:spPr>
+          <a:xfrm>
+            <a:off x="4937760" y="5705856"/>
             <a:ext cx="777240" cy="201168"/>
           </a:xfrm>
           <a:prstGeom prst="roundRect">
@@ -7802,13 +9993,13 @@
       </p:sp>
       <p:sp>
         <p:nvSpPr>
-          <p:cNvPr id="35" name="TextBox 34"/>
-          <p:cNvSpPr txBox="1"/>
-          <p:nvPr/>
-        </p:nvSpPr>
-        <p:spPr>
-          <a:xfrm>
-            <a:off x="4937760" y="2743200"/>
+          <p:cNvPr id="94" name="TextBox 93"/>
+          <p:cNvSpPr txBox="1"/>
+          <p:nvPr/>
+        </p:nvSpPr>
+        <p:spPr>
+          <a:xfrm>
+            <a:off x="4937760" y="5705856"/>
             <a:ext cx="777240" cy="201168"/>
           </a:xfrm>
           <a:prstGeom prst="rect">
@@ -7837,13 +10028,13 @@
       </p:sp>
       <p:sp>
         <p:nvSpPr>
-          <p:cNvPr id="36" name="TextBox 35"/>
-          <p:cNvSpPr txBox="1"/>
-          <p:nvPr/>
-        </p:nvSpPr>
-        <p:spPr>
-          <a:xfrm>
-            <a:off x="7498079" y="2679192"/>
+          <p:cNvPr id="95" name="TextBox 94"/>
+          <p:cNvSpPr txBox="1"/>
+          <p:nvPr/>
+        </p:nvSpPr>
+        <p:spPr>
+          <a:xfrm>
+            <a:off x="7498079" y="5641848"/>
             <a:ext cx="2651760" cy="329184"/>
           </a:xfrm>
           <a:prstGeom prst="rect">
@@ -7872,13 +10063,13 @@
       </p:sp>
       <p:sp>
         <p:nvSpPr>
-          <p:cNvPr id="37" name="TextBox 36"/>
-          <p:cNvSpPr txBox="1"/>
-          <p:nvPr/>
-        </p:nvSpPr>
-        <p:spPr>
-          <a:xfrm>
-            <a:off x="10149840" y="2679192"/>
+          <p:cNvPr id="96" name="TextBox 95"/>
+          <p:cNvSpPr txBox="1"/>
+          <p:nvPr/>
+        </p:nvSpPr>
+        <p:spPr>
+          <a:xfrm>
+            <a:off x="10149840" y="5641848"/>
             <a:ext cx="1188720" cy="329184"/>
           </a:xfrm>
           <a:prstGeom prst="rect">
@@ -7900,20 +10091,239 @@
                 </a:solidFill>
                 <a:latin typeface="Calibri"/>
               </a:rPr>
-              <a:t>6.42 km</a:t>
-            </a:r>
-          </a:p>
-        </p:txBody>
-      </p:sp>
-      <p:sp>
-        <p:nvSpPr>
-          <p:cNvPr id="38" name="Rectangle 37"/>
+              <a:t>6.14 km</a:t>
+            </a:r>
+          </a:p>
+        </p:txBody>
+      </p:sp>
+      <p:sp>
+        <p:nvSpPr>
+          <p:cNvPr id="97" name="TextBox 96"/>
+          <p:cNvSpPr txBox="1"/>
+          <p:nvPr/>
+        </p:nvSpPr>
+        <p:spPr>
+          <a:xfrm>
+            <a:off x="548640" y="5971032"/>
+            <a:ext cx="2560320" cy="329184"/>
+          </a:xfrm>
+          <a:prstGeom prst="rect">
+            <a:avLst/>
+          </a:prstGeom>
+          <a:noFill/>
+        </p:spPr>
+        <p:txBody>
+          <a:bodyPr wrap="square" lIns="45720" rIns="45720" anchor="ctr">
+            <a:spAutoFit/>
+          </a:bodyPr>
+          <a:lstStyle/>
+          <a:p>
+            <a:pPr algn="l"/>
+            <a:r>
+              <a:rPr sz="1100" b="1">
+                <a:solidFill>
+                  <a:srgbClr val="1A1A2E"/>
+                </a:solidFill>
+                <a:latin typeface="Calibri"/>
+              </a:rPr>
+              <a:t>RUE</a:t>
+            </a:r>
+          </a:p>
+        </p:txBody>
+      </p:sp>
+      <p:sp>
+        <p:nvSpPr>
+          <p:cNvPr id="98" name="TextBox 97"/>
+          <p:cNvSpPr txBox="1"/>
+          <p:nvPr/>
+        </p:nvSpPr>
+        <p:spPr>
+          <a:xfrm>
+            <a:off x="3108960" y="5971032"/>
+            <a:ext cx="1737360" cy="329184"/>
+          </a:xfrm>
+          <a:prstGeom prst="rect">
+            <a:avLst/>
+          </a:prstGeom>
+          <a:noFill/>
+        </p:spPr>
+        <p:txBody>
+          <a:bodyPr wrap="square" lIns="45720" rIns="45720" anchor="ctr">
+            <a:spAutoFit/>
+          </a:bodyPr>
+          <a:lstStyle/>
+          <a:p>
+            <a:pPr algn="l"/>
+            <a:r>
+              <a:rPr sz="1100" b="0">
+                <a:solidFill>
+                  <a:srgbClr val="1A1A2E"/>
+                </a:solidFill>
+                <a:latin typeface="Calibri"/>
+              </a:rPr>
+              <a:t>5 422 t</a:t>
+            </a:r>
+          </a:p>
+        </p:txBody>
+      </p:sp>
+      <p:sp>
+        <p:nvSpPr>
+          <p:cNvPr id="99" name="Rounded Rectangle 98"/>
           <p:cNvSpPr/>
           <p:nvPr/>
         </p:nvSpPr>
         <p:spPr>
           <a:xfrm>
-            <a:off x="457200" y="3008376"/>
+            <a:off x="4937760" y="6035040"/>
+            <a:ext cx="777240" cy="201168"/>
+          </a:xfrm>
+          <a:prstGeom prst="roundRect">
+            <a:avLst/>
+          </a:prstGeom>
+          <a:solidFill>
+            <a:srgbClr val="2CA02C"/>
+          </a:solidFill>
+          <a:ln>
+            <a:noFill/>
+          </a:ln>
+          <a:effectLst/>
+        </p:spPr>
+        <p:style>
+          <a:lnRef idx="1">
+            <a:schemeClr val="accent1"/>
+          </a:lnRef>
+          <a:fillRef idx="3">
+            <a:schemeClr val="accent1"/>
+          </a:fillRef>
+          <a:effectRef idx="2">
+            <a:schemeClr val="accent1"/>
+          </a:effectRef>
+          <a:fontRef idx="minor">
+            <a:schemeClr val="lt1"/>
+          </a:fontRef>
+        </p:style>
+        <p:txBody>
+          <a:bodyPr rtlCol="0" anchor="ctr"/>
+          <a:lstStyle/>
+          <a:p>
+            <a:pPr algn="ctr"/>
+          </a:p>
+        </p:txBody>
+      </p:sp>
+      <p:sp>
+        <p:nvSpPr>
+          <p:cNvPr id="100" name="TextBox 99"/>
+          <p:cNvSpPr txBox="1"/>
+          <p:nvPr/>
+        </p:nvSpPr>
+        <p:spPr>
+          <a:xfrm>
+            <a:off x="4937760" y="6035040"/>
+            <a:ext cx="777240" cy="201168"/>
+          </a:xfrm>
+          <a:prstGeom prst="rect">
+            <a:avLst/>
+          </a:prstGeom>
+          <a:noFill/>
+        </p:spPr>
+        <p:txBody>
+          <a:bodyPr wrap="square" lIns="45720" rIns="45720" anchor="ctr">
+            <a:spAutoFit/>
+          </a:bodyPr>
+          <a:lstStyle/>
+          <a:p>
+            <a:pPr algn="ctr"/>
+            <a:r>
+              <a:rPr sz="900" b="1">
+                <a:solidFill>
+                  <a:srgbClr val="FFFFFF"/>
+                </a:solidFill>
+                <a:latin typeface="Calibri"/>
+              </a:rPr>
+              <a:t>Unéal</a:t>
+            </a:r>
+          </a:p>
+        </p:txBody>
+      </p:sp>
+      <p:sp>
+        <p:nvSpPr>
+          <p:cNvPr id="101" name="TextBox 100"/>
+          <p:cNvSpPr txBox="1"/>
+          <p:nvPr/>
+        </p:nvSpPr>
+        <p:spPr>
+          <a:xfrm>
+            <a:off x="7498079" y="5971032"/>
+            <a:ext cx="2651760" cy="329184"/>
+          </a:xfrm>
+          <a:prstGeom prst="rect">
+            <a:avLst/>
+          </a:prstGeom>
+          <a:noFill/>
+        </p:spPr>
+        <p:txBody>
+          <a:bodyPr wrap="square" lIns="45720" rIns="45720" anchor="ctr">
+            <a:spAutoFit/>
+          </a:bodyPr>
+          <a:lstStyle/>
+          <a:p>
+            <a:pPr algn="l"/>
+            <a:r>
+              <a:rPr sz="1000" b="0">
+                <a:solidFill>
+                  <a:srgbClr val="666666"/>
+                </a:solidFill>
+                <a:latin typeface="Calibri"/>
+              </a:rPr>
+              <a:t>FOREST-MONTIERS</a:t>
+            </a:r>
+          </a:p>
+        </p:txBody>
+      </p:sp>
+      <p:sp>
+        <p:nvSpPr>
+          <p:cNvPr id="102" name="TextBox 101"/>
+          <p:cNvSpPr txBox="1"/>
+          <p:nvPr/>
+        </p:nvSpPr>
+        <p:spPr>
+          <a:xfrm>
+            <a:off x="10149840" y="5971032"/>
+            <a:ext cx="1188720" cy="329184"/>
+          </a:xfrm>
+          <a:prstGeom prst="rect">
+            <a:avLst/>
+          </a:prstGeom>
+          <a:noFill/>
+        </p:spPr>
+        <p:txBody>
+          <a:bodyPr wrap="square" lIns="45720" rIns="45720" anchor="ctr">
+            <a:spAutoFit/>
+          </a:bodyPr>
+          <a:lstStyle/>
+          <a:p>
+            <a:pPr algn="l"/>
+            <a:r>
+              <a:rPr sz="1000" b="0">
+                <a:solidFill>
+                  <a:srgbClr val="666666"/>
+                </a:solidFill>
+                <a:latin typeface="Calibri"/>
+              </a:rPr>
+              <a:t>5.76 km</a:t>
+            </a:r>
+          </a:p>
+        </p:txBody>
+      </p:sp>
+      <p:sp>
+        <p:nvSpPr>
+          <p:cNvPr id="103" name="Rectangle 102"/>
+          <p:cNvSpPr/>
+          <p:nvPr/>
+        </p:nvSpPr>
+        <p:spPr>
+          <a:xfrm>
+            <a:off x="457200" y="6300216"/>
             <a:ext cx="11277295" cy="329184"/>
           </a:xfrm>
           <a:prstGeom prst="rect">
@@ -7951,13 +10361,13 @@
       </p:sp>
       <p:sp>
         <p:nvSpPr>
-          <p:cNvPr id="39" name="TextBox 38"/>
-          <p:cNvSpPr txBox="1"/>
-          <p:nvPr/>
-        </p:nvSpPr>
-        <p:spPr>
-          <a:xfrm>
-            <a:off x="548640" y="3008376"/>
+          <p:cNvPr id="104" name="TextBox 103"/>
+          <p:cNvSpPr txBox="1"/>
+          <p:nvPr/>
+        </p:nvSpPr>
+        <p:spPr>
+          <a:xfrm>
+            <a:off x="548640" y="6300216"/>
             <a:ext cx="2560320" cy="329184"/>
           </a:xfrm>
           <a:prstGeom prst="rect">
@@ -7979,20 +10389,20 @@
                 </a:solidFill>
                 <a:latin typeface="Calibri"/>
               </a:rPr>
-              <a:t>AVESNES LES BAPAUME</a:t>
-            </a:r>
-          </a:p>
-        </p:txBody>
-      </p:sp>
-      <p:sp>
-        <p:nvSpPr>
-          <p:cNvPr id="40" name="TextBox 39"/>
-          <p:cNvSpPr txBox="1"/>
-          <p:nvPr/>
-        </p:nvSpPr>
-        <p:spPr>
-          <a:xfrm>
-            <a:off x="3108960" y="3008376"/>
+              <a:t>GUINES</a:t>
+            </a:r>
+          </a:p>
+        </p:txBody>
+      </p:sp>
+      <p:sp>
+        <p:nvSpPr>
+          <p:cNvPr id="105" name="TextBox 104"/>
+          <p:cNvSpPr txBox="1"/>
+          <p:nvPr/>
+        </p:nvSpPr>
+        <p:spPr>
+          <a:xfrm>
+            <a:off x="3108960" y="6300216"/>
             <a:ext cx="1737360" cy="329184"/>
           </a:xfrm>
           <a:prstGeom prst="rect">
@@ -8014,1203 +10424,20 @@
                 </a:solidFill>
                 <a:latin typeface="Calibri"/>
               </a:rPr>
-              <a:t>9 921 t</a:t>
-            </a:r>
-          </a:p>
-        </p:txBody>
-      </p:sp>
-      <p:sp>
-        <p:nvSpPr>
-          <p:cNvPr id="41" name="Rounded Rectangle 40"/>
+              <a:t>5 212 t</a:t>
+            </a:r>
+          </a:p>
+        </p:txBody>
+      </p:sp>
+      <p:sp>
+        <p:nvSpPr>
+          <p:cNvPr id="106" name="Rounded Rectangle 105"/>
           <p:cNvSpPr/>
           <p:nvPr/>
         </p:nvSpPr>
         <p:spPr>
           <a:xfrm>
-            <a:off x="4937760" y="3072384"/>
-            <a:ext cx="777240" cy="201168"/>
-          </a:xfrm>
-          <a:prstGeom prst="roundRect">
-            <a:avLst/>
-          </a:prstGeom>
-          <a:solidFill>
-            <a:srgbClr val="1F77B4"/>
-          </a:solidFill>
-          <a:ln>
-            <a:noFill/>
-          </a:ln>
-          <a:effectLst/>
-        </p:spPr>
-        <p:style>
-          <a:lnRef idx="1">
-            <a:schemeClr val="accent1"/>
-          </a:lnRef>
-          <a:fillRef idx="3">
-            <a:schemeClr val="accent1"/>
-          </a:fillRef>
-          <a:effectRef idx="2">
-            <a:schemeClr val="accent1"/>
-          </a:effectRef>
-          <a:fontRef idx="minor">
-            <a:schemeClr val="lt1"/>
-          </a:fontRef>
-        </p:style>
-        <p:txBody>
-          <a:bodyPr rtlCol="0" anchor="ctr"/>
-          <a:lstStyle/>
-          <a:p>
-            <a:pPr algn="ctr"/>
-          </a:p>
-        </p:txBody>
-      </p:sp>
-      <p:sp>
-        <p:nvSpPr>
-          <p:cNvPr id="42" name="TextBox 41"/>
-          <p:cNvSpPr txBox="1"/>
-          <p:nvPr/>
-        </p:nvSpPr>
-        <p:spPr>
-          <a:xfrm>
-            <a:off x="4937760" y="3072384"/>
-            <a:ext cx="777240" cy="201168"/>
-          </a:xfrm>
-          <a:prstGeom prst="rect">
-            <a:avLst/>
-          </a:prstGeom>
-          <a:noFill/>
-        </p:spPr>
-        <p:txBody>
-          <a:bodyPr wrap="square" lIns="45720" rIns="45720" anchor="ctr">
-            <a:spAutoFit/>
-          </a:bodyPr>
-          <a:lstStyle/>
-          <a:p>
-            <a:pPr algn="ctr"/>
-            <a:r>
-              <a:rPr sz="900" b="1">
-                <a:solidFill>
-                  <a:srgbClr val="FFFFFF"/>
-                </a:solidFill>
-                <a:latin typeface="Calibri"/>
-              </a:rPr>
-              <a:t>Ternoveo</a:t>
-            </a:r>
-          </a:p>
-        </p:txBody>
-      </p:sp>
-      <p:sp>
-        <p:nvSpPr>
-          <p:cNvPr id="43" name="TextBox 42"/>
-          <p:cNvSpPr txBox="1"/>
-          <p:nvPr/>
-        </p:nvSpPr>
-        <p:spPr>
-          <a:xfrm>
-            <a:off x="7498079" y="3008376"/>
-            <a:ext cx="2651760" cy="329184"/>
-          </a:xfrm>
-          <a:prstGeom prst="rect">
-            <a:avLst/>
-          </a:prstGeom>
-          <a:noFill/>
-        </p:spPr>
-        <p:txBody>
-          <a:bodyPr wrap="square" lIns="45720" rIns="45720" anchor="ctr">
-            <a:spAutoFit/>
-          </a:bodyPr>
-          <a:lstStyle/>
-          <a:p>
-            <a:pPr algn="l"/>
-            <a:r>
-              <a:rPr sz="1000" b="0">
-                <a:solidFill>
-                  <a:srgbClr val="666666"/>
-                </a:solidFill>
-                <a:latin typeface="Calibri"/>
-              </a:rPr>
-              <a:t>ACHIET-LE-PETIT</a:t>
-            </a:r>
-          </a:p>
-        </p:txBody>
-      </p:sp>
-      <p:sp>
-        <p:nvSpPr>
-          <p:cNvPr id="44" name="TextBox 43"/>
-          <p:cNvSpPr txBox="1"/>
-          <p:nvPr/>
-        </p:nvSpPr>
-        <p:spPr>
-          <a:xfrm>
-            <a:off x="10149840" y="3008376"/>
-            <a:ext cx="1188720" cy="329184"/>
-          </a:xfrm>
-          <a:prstGeom prst="rect">
-            <a:avLst/>
-          </a:prstGeom>
-          <a:noFill/>
-        </p:spPr>
-        <p:txBody>
-          <a:bodyPr wrap="square" lIns="45720" rIns="45720" anchor="ctr">
-            <a:spAutoFit/>
-          </a:bodyPr>
-          <a:lstStyle/>
-          <a:p>
-            <a:pPr algn="l"/>
-            <a:r>
-              <a:rPr sz="1000" b="0">
-                <a:solidFill>
-                  <a:srgbClr val="666666"/>
-                </a:solidFill>
-                <a:latin typeface="Calibri"/>
-              </a:rPr>
-              <a:t>6.37 km</a:t>
-            </a:r>
-          </a:p>
-        </p:txBody>
-      </p:sp>
-      <p:sp>
-        <p:nvSpPr>
-          <p:cNvPr id="45" name="TextBox 44"/>
-          <p:cNvSpPr txBox="1"/>
-          <p:nvPr/>
-        </p:nvSpPr>
-        <p:spPr>
-          <a:xfrm>
-            <a:off x="548640" y="3337560"/>
-            <a:ext cx="2560320" cy="329184"/>
-          </a:xfrm>
-          <a:prstGeom prst="rect">
-            <a:avLst/>
-          </a:prstGeom>
-          <a:noFill/>
-        </p:spPr>
-        <p:txBody>
-          <a:bodyPr wrap="square" lIns="45720" rIns="45720" anchor="ctr">
-            <a:spAutoFit/>
-          </a:bodyPr>
-          <a:lstStyle/>
-          <a:p>
-            <a:pPr algn="l"/>
-            <a:r>
-              <a:rPr sz="1100" b="1">
-                <a:solidFill>
-                  <a:srgbClr val="1A1A2E"/>
-                </a:solidFill>
-                <a:latin typeface="Calibri"/>
-              </a:rPr>
-              <a:t>LA NEUVILLE</a:t>
-            </a:r>
-          </a:p>
-        </p:txBody>
-      </p:sp>
-      <p:sp>
-        <p:nvSpPr>
-          <p:cNvPr id="46" name="TextBox 45"/>
-          <p:cNvSpPr txBox="1"/>
-          <p:nvPr/>
-        </p:nvSpPr>
-        <p:spPr>
-          <a:xfrm>
-            <a:off x="3108960" y="3337560"/>
-            <a:ext cx="1737360" cy="329184"/>
-          </a:xfrm>
-          <a:prstGeom prst="rect">
-            <a:avLst/>
-          </a:prstGeom>
-          <a:noFill/>
-        </p:spPr>
-        <p:txBody>
-          <a:bodyPr wrap="square" lIns="45720" rIns="45720" anchor="ctr">
-            <a:spAutoFit/>
-          </a:bodyPr>
-          <a:lstStyle/>
-          <a:p>
-            <a:pPr algn="l"/>
-            <a:r>
-              <a:rPr sz="1100" b="0">
-                <a:solidFill>
-                  <a:srgbClr val="1A1A2E"/>
-                </a:solidFill>
-                <a:latin typeface="Calibri"/>
-              </a:rPr>
-              <a:t>9 617 t</a:t>
-            </a:r>
-          </a:p>
-        </p:txBody>
-      </p:sp>
-      <p:sp>
-        <p:nvSpPr>
-          <p:cNvPr id="47" name="Rounded Rectangle 46"/>
-          <p:cNvSpPr/>
-          <p:nvPr/>
-        </p:nvSpPr>
-        <p:spPr>
-          <a:xfrm>
-            <a:off x="4937760" y="3401568"/>
-            <a:ext cx="777240" cy="201168"/>
-          </a:xfrm>
-          <a:prstGeom prst="roundRect">
-            <a:avLst/>
-          </a:prstGeom>
-          <a:solidFill>
-            <a:srgbClr val="1F77B4"/>
-          </a:solidFill>
-          <a:ln>
-            <a:noFill/>
-          </a:ln>
-          <a:effectLst/>
-        </p:spPr>
-        <p:style>
-          <a:lnRef idx="1">
-            <a:schemeClr val="accent1"/>
-          </a:lnRef>
-          <a:fillRef idx="3">
-            <a:schemeClr val="accent1"/>
-          </a:fillRef>
-          <a:effectRef idx="2">
-            <a:schemeClr val="accent1"/>
-          </a:effectRef>
-          <a:fontRef idx="minor">
-            <a:schemeClr val="lt1"/>
-          </a:fontRef>
-        </p:style>
-        <p:txBody>
-          <a:bodyPr rtlCol="0" anchor="ctr"/>
-          <a:lstStyle/>
-          <a:p>
-            <a:pPr algn="ctr"/>
-          </a:p>
-        </p:txBody>
-      </p:sp>
-      <p:sp>
-        <p:nvSpPr>
-          <p:cNvPr id="48" name="TextBox 47"/>
-          <p:cNvSpPr txBox="1"/>
-          <p:nvPr/>
-        </p:nvSpPr>
-        <p:spPr>
-          <a:xfrm>
-            <a:off x="4937760" y="3401568"/>
-            <a:ext cx="777240" cy="201168"/>
-          </a:xfrm>
-          <a:prstGeom prst="rect">
-            <a:avLst/>
-          </a:prstGeom>
-          <a:noFill/>
-        </p:spPr>
-        <p:txBody>
-          <a:bodyPr wrap="square" lIns="45720" rIns="45720" anchor="ctr">
-            <a:spAutoFit/>
-          </a:bodyPr>
-          <a:lstStyle/>
-          <a:p>
-            <a:pPr algn="ctr"/>
-            <a:r>
-              <a:rPr sz="900" b="1">
-                <a:solidFill>
-                  <a:srgbClr val="FFFFFF"/>
-                </a:solidFill>
-                <a:latin typeface="Calibri"/>
-              </a:rPr>
-              <a:t>Ternoveo</a:t>
-            </a:r>
-          </a:p>
-        </p:txBody>
-      </p:sp>
-      <p:sp>
-        <p:nvSpPr>
-          <p:cNvPr id="49" name="TextBox 48"/>
-          <p:cNvSpPr txBox="1"/>
-          <p:nvPr/>
-        </p:nvSpPr>
-        <p:spPr>
-          <a:xfrm>
-            <a:off x="7498079" y="3337560"/>
-            <a:ext cx="2651760" cy="329184"/>
-          </a:xfrm>
-          <a:prstGeom prst="rect">
-            <a:avLst/>
-          </a:prstGeom>
-          <a:noFill/>
-        </p:spPr>
-        <p:txBody>
-          <a:bodyPr wrap="square" lIns="45720" rIns="45720" anchor="ctr">
-            <a:spAutoFit/>
-          </a:bodyPr>
-          <a:lstStyle/>
-          <a:p>
-            <a:pPr algn="l"/>
-            <a:r>
-              <a:rPr sz="1000" b="0">
-                <a:solidFill>
-                  <a:srgbClr val="666666"/>
-                </a:solidFill>
-                <a:latin typeface="Calibri"/>
-              </a:rPr>
-              <a:t>DOMPIERRE-BECQUINCOURT</a:t>
-            </a:r>
-          </a:p>
-        </p:txBody>
-      </p:sp>
-      <p:sp>
-        <p:nvSpPr>
-          <p:cNvPr id="50" name="TextBox 49"/>
-          <p:cNvSpPr txBox="1"/>
-          <p:nvPr/>
-        </p:nvSpPr>
-        <p:spPr>
-          <a:xfrm>
-            <a:off x="10149840" y="3337560"/>
-            <a:ext cx="1188720" cy="329184"/>
-          </a:xfrm>
-          <a:prstGeom prst="rect">
-            <a:avLst/>
-          </a:prstGeom>
-          <a:noFill/>
-        </p:spPr>
-        <p:txBody>
-          <a:bodyPr wrap="square" lIns="45720" rIns="45720" anchor="ctr">
-            <a:spAutoFit/>
-          </a:bodyPr>
-          <a:lstStyle/>
-          <a:p>
-            <a:pPr algn="l"/>
-            <a:r>
-              <a:rPr sz="1000" b="0">
-                <a:solidFill>
-                  <a:srgbClr val="666666"/>
-                </a:solidFill>
-                <a:latin typeface="Calibri"/>
-              </a:rPr>
-              <a:t>4.8 km</a:t>
-            </a:r>
-          </a:p>
-        </p:txBody>
-      </p:sp>
-      <p:sp>
-        <p:nvSpPr>
-          <p:cNvPr id="51" name="Rectangle 50"/>
-          <p:cNvSpPr/>
-          <p:nvPr/>
-        </p:nvSpPr>
-        <p:spPr>
-          <a:xfrm>
-            <a:off x="457200" y="3666744"/>
-            <a:ext cx="11277295" cy="329184"/>
-          </a:xfrm>
-          <a:prstGeom prst="rect">
-            <a:avLst/>
-          </a:prstGeom>
-          <a:solidFill>
-            <a:srgbClr val="F4F4F6"/>
-          </a:solidFill>
-          <a:ln>
-            <a:noFill/>
-          </a:ln>
-          <a:effectLst/>
-        </p:spPr>
-        <p:style>
-          <a:lnRef idx="1">
-            <a:schemeClr val="accent1"/>
-          </a:lnRef>
-          <a:fillRef idx="3">
-            <a:schemeClr val="accent1"/>
-          </a:fillRef>
-          <a:effectRef idx="2">
-            <a:schemeClr val="accent1"/>
-          </a:effectRef>
-          <a:fontRef idx="minor">
-            <a:schemeClr val="lt1"/>
-          </a:fontRef>
-        </p:style>
-        <p:txBody>
-          <a:bodyPr rtlCol="0" anchor="ctr"/>
-          <a:lstStyle/>
-          <a:p>
-            <a:pPr algn="ctr"/>
-          </a:p>
-        </p:txBody>
-      </p:sp>
-      <p:sp>
-        <p:nvSpPr>
-          <p:cNvPr id="52" name="TextBox 51"/>
-          <p:cNvSpPr txBox="1"/>
-          <p:nvPr/>
-        </p:nvSpPr>
-        <p:spPr>
-          <a:xfrm>
-            <a:off x="548640" y="3666744"/>
-            <a:ext cx="2560320" cy="329184"/>
-          </a:xfrm>
-          <a:prstGeom prst="rect">
-            <a:avLst/>
-          </a:prstGeom>
-          <a:noFill/>
-        </p:spPr>
-        <p:txBody>
-          <a:bodyPr wrap="square" lIns="45720" rIns="45720" anchor="ctr">
-            <a:spAutoFit/>
-          </a:bodyPr>
-          <a:lstStyle/>
-          <a:p>
-            <a:pPr algn="l"/>
-            <a:r>
-              <a:rPr sz="1100" b="1">
-                <a:solidFill>
-                  <a:srgbClr val="1A1A2E"/>
-                </a:solidFill>
-                <a:latin typeface="Calibri"/>
-              </a:rPr>
-              <a:t>PIHEM</a:t>
-            </a:r>
-          </a:p>
-        </p:txBody>
-      </p:sp>
-      <p:sp>
-        <p:nvSpPr>
-          <p:cNvPr id="53" name="TextBox 52"/>
-          <p:cNvSpPr txBox="1"/>
-          <p:nvPr/>
-        </p:nvSpPr>
-        <p:spPr>
-          <a:xfrm>
-            <a:off x="3108960" y="3666744"/>
-            <a:ext cx="1737360" cy="329184"/>
-          </a:xfrm>
-          <a:prstGeom prst="rect">
-            <a:avLst/>
-          </a:prstGeom>
-          <a:noFill/>
-        </p:spPr>
-        <p:txBody>
-          <a:bodyPr wrap="square" lIns="45720" rIns="45720" anchor="ctr">
-            <a:spAutoFit/>
-          </a:bodyPr>
-          <a:lstStyle/>
-          <a:p>
-            <a:pPr algn="l"/>
-            <a:r>
-              <a:rPr sz="1100" b="0">
-                <a:solidFill>
-                  <a:srgbClr val="1A1A2E"/>
-                </a:solidFill>
-                <a:latin typeface="Calibri"/>
-              </a:rPr>
-              <a:t>6 611 t</a:t>
-            </a:r>
-          </a:p>
-        </p:txBody>
-      </p:sp>
-      <p:sp>
-        <p:nvSpPr>
-          <p:cNvPr id="54" name="Rounded Rectangle 53"/>
-          <p:cNvSpPr/>
-          <p:nvPr/>
-        </p:nvSpPr>
-        <p:spPr>
-          <a:xfrm>
-            <a:off x="4937760" y="3730752"/>
-            <a:ext cx="777240" cy="201168"/>
-          </a:xfrm>
-          <a:prstGeom prst="roundRect">
-            <a:avLst/>
-          </a:prstGeom>
-          <a:solidFill>
-            <a:srgbClr val="9C27B0"/>
-          </a:solidFill>
-          <a:ln>
-            <a:noFill/>
-          </a:ln>
-          <a:effectLst/>
-        </p:spPr>
-        <p:style>
-          <a:lnRef idx="1">
-            <a:schemeClr val="accent1"/>
-          </a:lnRef>
-          <a:fillRef idx="3">
-            <a:schemeClr val="accent1"/>
-          </a:fillRef>
-          <a:effectRef idx="2">
-            <a:schemeClr val="accent1"/>
-          </a:effectRef>
-          <a:fontRef idx="minor">
-            <a:schemeClr val="lt1"/>
-          </a:fontRef>
-        </p:style>
-        <p:txBody>
-          <a:bodyPr rtlCol="0" anchor="ctr"/>
-          <a:lstStyle/>
-          <a:p>
-            <a:pPr algn="ctr"/>
-          </a:p>
-        </p:txBody>
-      </p:sp>
-      <p:sp>
-        <p:nvSpPr>
-          <p:cNvPr id="55" name="TextBox 54"/>
-          <p:cNvSpPr txBox="1"/>
-          <p:nvPr/>
-        </p:nvSpPr>
-        <p:spPr>
-          <a:xfrm>
-            <a:off x="4937760" y="3730752"/>
-            <a:ext cx="777240" cy="201168"/>
-          </a:xfrm>
-          <a:prstGeom prst="rect">
-            <a:avLst/>
-          </a:prstGeom>
-          <a:noFill/>
-        </p:spPr>
-        <p:txBody>
-          <a:bodyPr wrap="square" lIns="45720" rIns="45720" anchor="ctr">
-            <a:spAutoFit/>
-          </a:bodyPr>
-          <a:lstStyle/>
-          <a:p>
-            <a:pPr algn="ctr"/>
-            <a:r>
-              <a:rPr sz="900" b="1">
-                <a:solidFill>
-                  <a:srgbClr val="FFFFFF"/>
-                </a:solidFill>
-                <a:latin typeface="Calibri"/>
-              </a:rPr>
-              <a:t>U + T</a:t>
-            </a:r>
-          </a:p>
-        </p:txBody>
-      </p:sp>
-      <p:sp>
-        <p:nvSpPr>
-          <p:cNvPr id="56" name="TextBox 55"/>
-          <p:cNvSpPr txBox="1"/>
-          <p:nvPr/>
-        </p:nvSpPr>
-        <p:spPr>
-          <a:xfrm>
-            <a:off x="7498079" y="3666744"/>
-            <a:ext cx="2651760" cy="329184"/>
-          </a:xfrm>
-          <a:prstGeom prst="rect">
-            <a:avLst/>
-          </a:prstGeom>
-          <a:noFill/>
-        </p:spPr>
-        <p:txBody>
-          <a:bodyPr wrap="square" lIns="45720" rIns="45720" anchor="ctr">
-            <a:spAutoFit/>
-          </a:bodyPr>
-          <a:lstStyle/>
-          <a:p>
-            <a:pPr algn="l"/>
-            <a:r>
-              <a:rPr sz="1000" b="0">
-                <a:solidFill>
-                  <a:srgbClr val="666666"/>
-                </a:solidFill>
-                <a:latin typeface="Calibri"/>
-              </a:rPr>
-              <a:t>DELETTES / THEROUANNE</a:t>
-            </a:r>
-          </a:p>
-        </p:txBody>
-      </p:sp>
-      <p:sp>
-        <p:nvSpPr>
-          <p:cNvPr id="57" name="TextBox 56"/>
-          <p:cNvSpPr txBox="1"/>
-          <p:nvPr/>
-        </p:nvSpPr>
-        <p:spPr>
-          <a:xfrm>
-            <a:off x="10149840" y="3666744"/>
-            <a:ext cx="1188720" cy="329184"/>
-          </a:xfrm>
-          <a:prstGeom prst="rect">
-            <a:avLst/>
-          </a:prstGeom>
-          <a:noFill/>
-        </p:spPr>
-        <p:txBody>
-          <a:bodyPr wrap="square" lIns="45720" rIns="45720" anchor="ctr">
-            <a:spAutoFit/>
-          </a:bodyPr>
-          <a:lstStyle/>
-          <a:p>
-            <a:pPr algn="l"/>
-            <a:r>
-              <a:rPr sz="1000" b="0">
-                <a:solidFill>
-                  <a:srgbClr val="666666"/>
-                </a:solidFill>
-                <a:latin typeface="Calibri"/>
-              </a:rPr>
-              <a:t>4.99 / 6.36 km</a:t>
-            </a:r>
-          </a:p>
-        </p:txBody>
-      </p:sp>
-      <p:sp>
-        <p:nvSpPr>
-          <p:cNvPr id="58" name="TextBox 57"/>
-          <p:cNvSpPr txBox="1"/>
-          <p:nvPr/>
-        </p:nvSpPr>
-        <p:spPr>
-          <a:xfrm>
-            <a:off x="548640" y="3995928"/>
-            <a:ext cx="2560320" cy="329184"/>
-          </a:xfrm>
-          <a:prstGeom prst="rect">
-            <a:avLst/>
-          </a:prstGeom>
-          <a:noFill/>
-        </p:spPr>
-        <p:txBody>
-          <a:bodyPr wrap="square" lIns="45720" rIns="45720" anchor="ctr">
-            <a:spAutoFit/>
-          </a:bodyPr>
-          <a:lstStyle/>
-          <a:p>
-            <a:pPr algn="l"/>
-            <a:r>
-              <a:rPr sz="1100" b="1">
-                <a:solidFill>
-                  <a:srgbClr val="1A1A2E"/>
-                </a:solidFill>
-                <a:latin typeface="Calibri"/>
-              </a:rPr>
-              <a:t>SOCX</a:t>
-            </a:r>
-          </a:p>
-        </p:txBody>
-      </p:sp>
-      <p:sp>
-        <p:nvSpPr>
-          <p:cNvPr id="59" name="TextBox 58"/>
-          <p:cNvSpPr txBox="1"/>
-          <p:nvPr/>
-        </p:nvSpPr>
-        <p:spPr>
-          <a:xfrm>
-            <a:off x="3108960" y="3995928"/>
-            <a:ext cx="1737360" cy="329184"/>
-          </a:xfrm>
-          <a:prstGeom prst="rect">
-            <a:avLst/>
-          </a:prstGeom>
-          <a:noFill/>
-        </p:spPr>
-        <p:txBody>
-          <a:bodyPr wrap="square" lIns="45720" rIns="45720" anchor="ctr">
-            <a:spAutoFit/>
-          </a:bodyPr>
-          <a:lstStyle/>
-          <a:p>
-            <a:pPr algn="l"/>
-            <a:r>
-              <a:rPr sz="1100" b="0">
-                <a:solidFill>
-                  <a:srgbClr val="1A1A2E"/>
-                </a:solidFill>
-                <a:latin typeface="Calibri"/>
-              </a:rPr>
-              <a:t>6 074 t</a:t>
-            </a:r>
-          </a:p>
-        </p:txBody>
-      </p:sp>
-      <p:sp>
-        <p:nvSpPr>
-          <p:cNvPr id="60" name="Rounded Rectangle 59"/>
-          <p:cNvSpPr/>
-          <p:nvPr/>
-        </p:nvSpPr>
-        <p:spPr>
-          <a:xfrm>
-            <a:off x="4937760" y="4059936"/>
-            <a:ext cx="777240" cy="201168"/>
-          </a:xfrm>
-          <a:prstGeom prst="roundRect">
-            <a:avLst/>
-          </a:prstGeom>
-          <a:solidFill>
-            <a:srgbClr val="1F77B4"/>
-          </a:solidFill>
-          <a:ln>
-            <a:noFill/>
-          </a:ln>
-          <a:effectLst/>
-        </p:spPr>
-        <p:style>
-          <a:lnRef idx="1">
-            <a:schemeClr val="accent1"/>
-          </a:lnRef>
-          <a:fillRef idx="3">
-            <a:schemeClr val="accent1"/>
-          </a:fillRef>
-          <a:effectRef idx="2">
-            <a:schemeClr val="accent1"/>
-          </a:effectRef>
-          <a:fontRef idx="minor">
-            <a:schemeClr val="lt1"/>
-          </a:fontRef>
-        </p:style>
-        <p:txBody>
-          <a:bodyPr rtlCol="0" anchor="ctr"/>
-          <a:lstStyle/>
-          <a:p>
-            <a:pPr algn="ctr"/>
-          </a:p>
-        </p:txBody>
-      </p:sp>
-      <p:sp>
-        <p:nvSpPr>
-          <p:cNvPr id="61" name="TextBox 60"/>
-          <p:cNvSpPr txBox="1"/>
-          <p:nvPr/>
-        </p:nvSpPr>
-        <p:spPr>
-          <a:xfrm>
-            <a:off x="4937760" y="4059936"/>
-            <a:ext cx="777240" cy="201168"/>
-          </a:xfrm>
-          <a:prstGeom prst="rect">
-            <a:avLst/>
-          </a:prstGeom>
-          <a:noFill/>
-        </p:spPr>
-        <p:txBody>
-          <a:bodyPr wrap="square" lIns="45720" rIns="45720" anchor="ctr">
-            <a:spAutoFit/>
-          </a:bodyPr>
-          <a:lstStyle/>
-          <a:p>
-            <a:pPr algn="ctr"/>
-            <a:r>
-              <a:rPr sz="900" b="1">
-                <a:solidFill>
-                  <a:srgbClr val="FFFFFF"/>
-                </a:solidFill>
-                <a:latin typeface="Calibri"/>
-              </a:rPr>
-              <a:t>Ternoveo</a:t>
-            </a:r>
-          </a:p>
-        </p:txBody>
-      </p:sp>
-      <p:sp>
-        <p:nvSpPr>
-          <p:cNvPr id="62" name="TextBox 61"/>
-          <p:cNvSpPr txBox="1"/>
-          <p:nvPr/>
-        </p:nvSpPr>
-        <p:spPr>
-          <a:xfrm>
-            <a:off x="7498079" y="3995928"/>
-            <a:ext cx="2651760" cy="329184"/>
-          </a:xfrm>
-          <a:prstGeom prst="rect">
-            <a:avLst/>
-          </a:prstGeom>
-          <a:noFill/>
-        </p:spPr>
-        <p:txBody>
-          <a:bodyPr wrap="square" lIns="45720" rIns="45720" anchor="ctr">
-            <a:spAutoFit/>
-          </a:bodyPr>
-          <a:lstStyle/>
-          <a:p>
-            <a:pPr algn="l"/>
-            <a:r>
-              <a:rPr sz="1000" b="0">
-                <a:solidFill>
-                  <a:srgbClr val="666666"/>
-                </a:solidFill>
-                <a:latin typeface="Calibri"/>
-              </a:rPr>
-              <a:t>BIERNE</a:t>
-            </a:r>
-          </a:p>
-        </p:txBody>
-      </p:sp>
-      <p:sp>
-        <p:nvSpPr>
-          <p:cNvPr id="63" name="TextBox 62"/>
-          <p:cNvSpPr txBox="1"/>
-          <p:nvPr/>
-        </p:nvSpPr>
-        <p:spPr>
-          <a:xfrm>
-            <a:off x="10149840" y="3995928"/>
-            <a:ext cx="1188720" cy="329184"/>
-          </a:xfrm>
-          <a:prstGeom prst="rect">
-            <a:avLst/>
-          </a:prstGeom>
-          <a:noFill/>
-        </p:spPr>
-        <p:txBody>
-          <a:bodyPr wrap="square" lIns="45720" rIns="45720" anchor="ctr">
-            <a:spAutoFit/>
-          </a:bodyPr>
-          <a:lstStyle/>
-          <a:p>
-            <a:pPr algn="l"/>
-            <a:r>
-              <a:rPr sz="1000" b="0">
-                <a:solidFill>
-                  <a:srgbClr val="666666"/>
-                </a:solidFill>
-                <a:latin typeface="Calibri"/>
-              </a:rPr>
-              <a:t>2.08 km</a:t>
-            </a:r>
-          </a:p>
-        </p:txBody>
-      </p:sp>
-      <p:sp>
-        <p:nvSpPr>
-          <p:cNvPr id="64" name="Rectangle 63"/>
-          <p:cNvSpPr/>
-          <p:nvPr/>
-        </p:nvSpPr>
-        <p:spPr>
-          <a:xfrm>
-            <a:off x="457200" y="4325112"/>
-            <a:ext cx="11277295" cy="329184"/>
-          </a:xfrm>
-          <a:prstGeom prst="rect">
-            <a:avLst/>
-          </a:prstGeom>
-          <a:solidFill>
-            <a:srgbClr val="F4F4F6"/>
-          </a:solidFill>
-          <a:ln>
-            <a:noFill/>
-          </a:ln>
-          <a:effectLst/>
-        </p:spPr>
-        <p:style>
-          <a:lnRef idx="1">
-            <a:schemeClr val="accent1"/>
-          </a:lnRef>
-          <a:fillRef idx="3">
-            <a:schemeClr val="accent1"/>
-          </a:fillRef>
-          <a:effectRef idx="2">
-            <a:schemeClr val="accent1"/>
-          </a:effectRef>
-          <a:fontRef idx="minor">
-            <a:schemeClr val="lt1"/>
-          </a:fontRef>
-        </p:style>
-        <p:txBody>
-          <a:bodyPr rtlCol="0" anchor="ctr"/>
-          <a:lstStyle/>
-          <a:p>
-            <a:pPr algn="ctr"/>
-          </a:p>
-        </p:txBody>
-      </p:sp>
-      <p:sp>
-        <p:nvSpPr>
-          <p:cNvPr id="65" name="TextBox 64"/>
-          <p:cNvSpPr txBox="1"/>
-          <p:nvPr/>
-        </p:nvSpPr>
-        <p:spPr>
-          <a:xfrm>
-            <a:off x="548640" y="4325112"/>
-            <a:ext cx="2560320" cy="329184"/>
-          </a:xfrm>
-          <a:prstGeom prst="rect">
-            <a:avLst/>
-          </a:prstGeom>
-          <a:noFill/>
-        </p:spPr>
-        <p:txBody>
-          <a:bodyPr wrap="square" lIns="45720" rIns="45720" anchor="ctr">
-            <a:spAutoFit/>
-          </a:bodyPr>
-          <a:lstStyle/>
-          <a:p>
-            <a:pPr algn="l"/>
-            <a:r>
-              <a:rPr sz="1100" b="1">
-                <a:solidFill>
-                  <a:srgbClr val="1A1A2E"/>
-                </a:solidFill>
-                <a:latin typeface="Calibri"/>
-              </a:rPr>
-              <a:t>BEAUDEDUIT PLAINE</a:t>
-            </a:r>
-          </a:p>
-        </p:txBody>
-      </p:sp>
-      <p:sp>
-        <p:nvSpPr>
-          <p:cNvPr id="66" name="TextBox 65"/>
-          <p:cNvSpPr txBox="1"/>
-          <p:nvPr/>
-        </p:nvSpPr>
-        <p:spPr>
-          <a:xfrm>
-            <a:off x="3108960" y="4325112"/>
-            <a:ext cx="1737360" cy="329184"/>
-          </a:xfrm>
-          <a:prstGeom prst="rect">
-            <a:avLst/>
-          </a:prstGeom>
-          <a:noFill/>
-        </p:spPr>
-        <p:txBody>
-          <a:bodyPr wrap="square" lIns="45720" rIns="45720" anchor="ctr">
-            <a:spAutoFit/>
-          </a:bodyPr>
-          <a:lstStyle/>
-          <a:p>
-            <a:pPr algn="l"/>
-            <a:r>
-              <a:rPr sz="1100" b="0">
-                <a:solidFill>
-                  <a:srgbClr val="1A1A2E"/>
-                </a:solidFill>
-                <a:latin typeface="Calibri"/>
-              </a:rPr>
-              <a:t>6 052 t</a:t>
-            </a:r>
-          </a:p>
-        </p:txBody>
-      </p:sp>
-      <p:sp>
-        <p:nvSpPr>
-          <p:cNvPr id="67" name="Rounded Rectangle 66"/>
-          <p:cNvSpPr/>
-          <p:nvPr/>
-        </p:nvSpPr>
-        <p:spPr>
-          <a:xfrm>
-            <a:off x="4937760" y="4389120"/>
-            <a:ext cx="777240" cy="201168"/>
-          </a:xfrm>
-          <a:prstGeom prst="roundRect">
-            <a:avLst/>
-          </a:prstGeom>
-          <a:solidFill>
-            <a:srgbClr val="1F77B4"/>
-          </a:solidFill>
-          <a:ln>
-            <a:noFill/>
-          </a:ln>
-          <a:effectLst/>
-        </p:spPr>
-        <p:style>
-          <a:lnRef idx="1">
-            <a:schemeClr val="accent1"/>
-          </a:lnRef>
-          <a:fillRef idx="3">
-            <a:schemeClr val="accent1"/>
-          </a:fillRef>
-          <a:effectRef idx="2">
-            <a:schemeClr val="accent1"/>
-          </a:effectRef>
-          <a:fontRef idx="minor">
-            <a:schemeClr val="lt1"/>
-          </a:fontRef>
-        </p:style>
-        <p:txBody>
-          <a:bodyPr rtlCol="0" anchor="ctr"/>
-          <a:lstStyle/>
-          <a:p>
-            <a:pPr algn="ctr"/>
-          </a:p>
-        </p:txBody>
-      </p:sp>
-      <p:sp>
-        <p:nvSpPr>
-          <p:cNvPr id="68" name="TextBox 67"/>
-          <p:cNvSpPr txBox="1"/>
-          <p:nvPr/>
-        </p:nvSpPr>
-        <p:spPr>
-          <a:xfrm>
-            <a:off x="4937760" y="4389120"/>
-            <a:ext cx="777240" cy="201168"/>
-          </a:xfrm>
-          <a:prstGeom prst="rect">
-            <a:avLst/>
-          </a:prstGeom>
-          <a:noFill/>
-        </p:spPr>
-        <p:txBody>
-          <a:bodyPr wrap="square" lIns="45720" rIns="45720" anchor="ctr">
-            <a:spAutoFit/>
-          </a:bodyPr>
-          <a:lstStyle/>
-          <a:p>
-            <a:pPr algn="ctr"/>
-            <a:r>
-              <a:rPr sz="900" b="1">
-                <a:solidFill>
-                  <a:srgbClr val="FFFFFF"/>
-                </a:solidFill>
-                <a:latin typeface="Calibri"/>
-              </a:rPr>
-              <a:t>Ternoveo</a:t>
-            </a:r>
-          </a:p>
-        </p:txBody>
-      </p:sp>
-      <p:sp>
-        <p:nvSpPr>
-          <p:cNvPr id="69" name="TextBox 68"/>
-          <p:cNvSpPr txBox="1"/>
-          <p:nvPr/>
-        </p:nvSpPr>
-        <p:spPr>
-          <a:xfrm>
-            <a:off x="7498079" y="4325112"/>
-            <a:ext cx="2651760" cy="329184"/>
-          </a:xfrm>
-          <a:prstGeom prst="rect">
-            <a:avLst/>
-          </a:prstGeom>
-          <a:noFill/>
-        </p:spPr>
-        <p:txBody>
-          <a:bodyPr wrap="square" lIns="45720" rIns="45720" anchor="ctr">
-            <a:spAutoFit/>
-          </a:bodyPr>
-          <a:lstStyle/>
-          <a:p>
-            <a:pPr algn="l"/>
-            <a:r>
-              <a:rPr sz="1000" b="0">
-                <a:solidFill>
-                  <a:srgbClr val="666666"/>
-                </a:solidFill>
-                <a:latin typeface="Calibri"/>
-              </a:rPr>
-              <a:t>BRASSY</a:t>
-            </a:r>
-          </a:p>
-        </p:txBody>
-      </p:sp>
-      <p:sp>
-        <p:nvSpPr>
-          <p:cNvPr id="70" name="TextBox 69"/>
-          <p:cNvSpPr txBox="1"/>
-          <p:nvPr/>
-        </p:nvSpPr>
-        <p:spPr>
-          <a:xfrm>
-            <a:off x="10149840" y="4325112"/>
-            <a:ext cx="1188720" cy="329184"/>
-          </a:xfrm>
-          <a:prstGeom prst="rect">
-            <a:avLst/>
-          </a:prstGeom>
-          <a:noFill/>
-        </p:spPr>
-        <p:txBody>
-          <a:bodyPr wrap="square" lIns="45720" rIns="45720" anchor="ctr">
-            <a:spAutoFit/>
-          </a:bodyPr>
-          <a:lstStyle/>
-          <a:p>
-            <a:pPr algn="l"/>
-            <a:r>
-              <a:rPr sz="1000" b="0">
-                <a:solidFill>
-                  <a:srgbClr val="666666"/>
-                </a:solidFill>
-                <a:latin typeface="Calibri"/>
-              </a:rPr>
-              <a:t>6.14 km</a:t>
-            </a:r>
-          </a:p>
-        </p:txBody>
-      </p:sp>
-      <p:sp>
-        <p:nvSpPr>
-          <p:cNvPr id="71" name="TextBox 70"/>
-          <p:cNvSpPr txBox="1"/>
-          <p:nvPr/>
-        </p:nvSpPr>
-        <p:spPr>
-          <a:xfrm>
-            <a:off x="548640" y="4654296"/>
-            <a:ext cx="2560320" cy="329184"/>
-          </a:xfrm>
-          <a:prstGeom prst="rect">
-            <a:avLst/>
-          </a:prstGeom>
-          <a:noFill/>
-        </p:spPr>
-        <p:txBody>
-          <a:bodyPr wrap="square" lIns="45720" rIns="45720" anchor="ctr">
-            <a:spAutoFit/>
-          </a:bodyPr>
-          <a:lstStyle/>
-          <a:p>
-            <a:pPr algn="l"/>
-            <a:r>
-              <a:rPr sz="1100" b="1">
-                <a:solidFill>
-                  <a:srgbClr val="1A1A2E"/>
-                </a:solidFill>
-                <a:latin typeface="Calibri"/>
-              </a:rPr>
-              <a:t>GUINES</a:t>
-            </a:r>
-          </a:p>
-        </p:txBody>
-      </p:sp>
-      <p:sp>
-        <p:nvSpPr>
-          <p:cNvPr id="72" name="TextBox 71"/>
-          <p:cNvSpPr txBox="1"/>
-          <p:nvPr/>
-        </p:nvSpPr>
-        <p:spPr>
-          <a:xfrm>
-            <a:off x="3108960" y="4654296"/>
-            <a:ext cx="1737360" cy="329184"/>
-          </a:xfrm>
-          <a:prstGeom prst="rect">
-            <a:avLst/>
-          </a:prstGeom>
-          <a:noFill/>
-        </p:spPr>
-        <p:txBody>
-          <a:bodyPr wrap="square" lIns="45720" rIns="45720" anchor="ctr">
-            <a:spAutoFit/>
-          </a:bodyPr>
-          <a:lstStyle/>
-          <a:p>
-            <a:pPr algn="l"/>
-            <a:r>
-              <a:rPr sz="1100" b="0">
-                <a:solidFill>
-                  <a:srgbClr val="1A1A2E"/>
-                </a:solidFill>
-                <a:latin typeface="Calibri"/>
-              </a:rPr>
-              <a:t>5 212 t</a:t>
-            </a:r>
-          </a:p>
-        </p:txBody>
-      </p:sp>
-      <p:sp>
-        <p:nvSpPr>
-          <p:cNvPr id="73" name="Rounded Rectangle 72"/>
-          <p:cNvSpPr/>
-          <p:nvPr/>
-        </p:nvSpPr>
-        <p:spPr>
-          <a:xfrm>
-            <a:off x="4937760" y="4718304"/>
+            <a:off x="4937760" y="6364224"/>
             <a:ext cx="777240" cy="201168"/>
           </a:xfrm>
           <a:prstGeom prst="roundRect">
@@ -9248,1191 +10475,8 @@
       </p:sp>
       <p:sp>
         <p:nvSpPr>
-          <p:cNvPr id="74" name="TextBox 73"/>
-          <p:cNvSpPr txBox="1"/>
-          <p:nvPr/>
-        </p:nvSpPr>
-        <p:spPr>
-          <a:xfrm>
-            <a:off x="4937760" y="4718304"/>
-            <a:ext cx="777240" cy="201168"/>
-          </a:xfrm>
-          <a:prstGeom prst="rect">
-            <a:avLst/>
-          </a:prstGeom>
-          <a:noFill/>
-        </p:spPr>
-        <p:txBody>
-          <a:bodyPr wrap="square" lIns="45720" rIns="45720" anchor="ctr">
-            <a:spAutoFit/>
-          </a:bodyPr>
-          <a:lstStyle/>
-          <a:p>
-            <a:pPr algn="ctr"/>
-            <a:r>
-              <a:rPr sz="900" b="1">
-                <a:solidFill>
-                  <a:srgbClr val="FFFFFF"/>
-                </a:solidFill>
-                <a:latin typeface="Calibri"/>
-              </a:rPr>
-              <a:t>Unéal</a:t>
-            </a:r>
-          </a:p>
-        </p:txBody>
-      </p:sp>
-      <p:sp>
-        <p:nvSpPr>
-          <p:cNvPr id="75" name="TextBox 74"/>
-          <p:cNvSpPr txBox="1"/>
-          <p:nvPr/>
-        </p:nvSpPr>
-        <p:spPr>
-          <a:xfrm>
-            <a:off x="7498079" y="4654296"/>
-            <a:ext cx="2651760" cy="329184"/>
-          </a:xfrm>
-          <a:prstGeom prst="rect">
-            <a:avLst/>
-          </a:prstGeom>
-          <a:noFill/>
-        </p:spPr>
-        <p:txBody>
-          <a:bodyPr wrap="square" lIns="45720" rIns="45720" anchor="ctr">
-            <a:spAutoFit/>
-          </a:bodyPr>
-          <a:lstStyle/>
-          <a:p>
-            <a:pPr algn="l"/>
-            <a:r>
-              <a:rPr sz="1000" b="0">
-                <a:solidFill>
-                  <a:srgbClr val="666666"/>
-                </a:solidFill>
-                <a:latin typeface="Calibri"/>
-              </a:rPr>
-              <a:t>CAFFIERS</a:t>
-            </a:r>
-          </a:p>
-        </p:txBody>
-      </p:sp>
-      <p:sp>
-        <p:nvSpPr>
-          <p:cNvPr id="76" name="TextBox 75"/>
-          <p:cNvSpPr txBox="1"/>
-          <p:nvPr/>
-        </p:nvSpPr>
-        <p:spPr>
-          <a:xfrm>
-            <a:off x="10149840" y="4654296"/>
-            <a:ext cx="1188720" cy="329184"/>
-          </a:xfrm>
-          <a:prstGeom prst="rect">
-            <a:avLst/>
-          </a:prstGeom>
-          <a:noFill/>
-        </p:spPr>
-        <p:txBody>
-          <a:bodyPr wrap="square" lIns="45720" rIns="45720" anchor="ctr">
-            <a:spAutoFit/>
-          </a:bodyPr>
-          <a:lstStyle/>
-          <a:p>
-            <a:pPr algn="l"/>
-            <a:r>
-              <a:rPr sz="1000" b="0">
-                <a:solidFill>
-                  <a:srgbClr val="666666"/>
-                </a:solidFill>
-                <a:latin typeface="Calibri"/>
-              </a:rPr>
-              <a:t>4.06 km</a:t>
-            </a:r>
-          </a:p>
-        </p:txBody>
-      </p:sp>
-      <p:sp>
-        <p:nvSpPr>
-          <p:cNvPr id="77" name="Rectangle 76"/>
-          <p:cNvSpPr/>
-          <p:nvPr/>
-        </p:nvSpPr>
-        <p:spPr>
-          <a:xfrm>
-            <a:off x="457200" y="4983480"/>
-            <a:ext cx="11277295" cy="329184"/>
-          </a:xfrm>
-          <a:prstGeom prst="rect">
-            <a:avLst/>
-          </a:prstGeom>
-          <a:solidFill>
-            <a:srgbClr val="F4F4F6"/>
-          </a:solidFill>
-          <a:ln>
-            <a:noFill/>
-          </a:ln>
-          <a:effectLst/>
-        </p:spPr>
-        <p:style>
-          <a:lnRef idx="1">
-            <a:schemeClr val="accent1"/>
-          </a:lnRef>
-          <a:fillRef idx="3">
-            <a:schemeClr val="accent1"/>
-          </a:fillRef>
-          <a:effectRef idx="2">
-            <a:schemeClr val="accent1"/>
-          </a:effectRef>
-          <a:fontRef idx="minor">
-            <a:schemeClr val="lt1"/>
-          </a:fontRef>
-        </p:style>
-        <p:txBody>
-          <a:bodyPr rtlCol="0" anchor="ctr"/>
-          <a:lstStyle/>
-          <a:p>
-            <a:pPr algn="ctr"/>
-          </a:p>
-        </p:txBody>
-      </p:sp>
-      <p:sp>
-        <p:nvSpPr>
-          <p:cNvPr id="78" name="TextBox 77"/>
-          <p:cNvSpPr txBox="1"/>
-          <p:nvPr/>
-        </p:nvSpPr>
-        <p:spPr>
-          <a:xfrm>
-            <a:off x="548640" y="4983480"/>
-            <a:ext cx="2560320" cy="329184"/>
-          </a:xfrm>
-          <a:prstGeom prst="rect">
-            <a:avLst/>
-          </a:prstGeom>
-          <a:noFill/>
-        </p:spPr>
-        <p:txBody>
-          <a:bodyPr wrap="square" lIns="45720" rIns="45720" anchor="ctr">
-            <a:spAutoFit/>
-          </a:bodyPr>
-          <a:lstStyle/>
-          <a:p>
-            <a:pPr algn="l"/>
-            <a:r>
-              <a:rPr sz="1100" b="1">
-                <a:solidFill>
-                  <a:srgbClr val="1A1A2E"/>
-                </a:solidFill>
-                <a:latin typeface="Calibri"/>
-              </a:rPr>
-              <a:t>LAMBRES-LEZ-AIRE</a:t>
-            </a:r>
-          </a:p>
-        </p:txBody>
-      </p:sp>
-      <p:sp>
-        <p:nvSpPr>
-          <p:cNvPr id="79" name="TextBox 78"/>
-          <p:cNvSpPr txBox="1"/>
-          <p:nvPr/>
-        </p:nvSpPr>
-        <p:spPr>
-          <a:xfrm>
-            <a:off x="3108960" y="4983480"/>
-            <a:ext cx="1737360" cy="329184"/>
-          </a:xfrm>
-          <a:prstGeom prst="rect">
-            <a:avLst/>
-          </a:prstGeom>
-          <a:noFill/>
-        </p:spPr>
-        <p:txBody>
-          <a:bodyPr wrap="square" lIns="45720" rIns="45720" anchor="ctr">
-            <a:spAutoFit/>
-          </a:bodyPr>
-          <a:lstStyle/>
-          <a:p>
-            <a:pPr algn="l"/>
-            <a:r>
-              <a:rPr sz="1100" b="0">
-                <a:solidFill>
-                  <a:srgbClr val="1A1A2E"/>
-                </a:solidFill>
-                <a:latin typeface="Calibri"/>
-              </a:rPr>
-              <a:t>5 196 t</a:t>
-            </a:r>
-          </a:p>
-        </p:txBody>
-      </p:sp>
-      <p:sp>
-        <p:nvSpPr>
-          <p:cNvPr id="80" name="Rounded Rectangle 79"/>
-          <p:cNvSpPr/>
-          <p:nvPr/>
-        </p:nvSpPr>
-        <p:spPr>
-          <a:xfrm>
-            <a:off x="4937760" y="5047488"/>
-            <a:ext cx="777240" cy="201168"/>
-          </a:xfrm>
-          <a:prstGeom prst="roundRect">
-            <a:avLst/>
-          </a:prstGeom>
-          <a:solidFill>
-            <a:srgbClr val="2CA02C"/>
-          </a:solidFill>
-          <a:ln>
-            <a:noFill/>
-          </a:ln>
-          <a:effectLst/>
-        </p:spPr>
-        <p:style>
-          <a:lnRef idx="1">
-            <a:schemeClr val="accent1"/>
-          </a:lnRef>
-          <a:fillRef idx="3">
-            <a:schemeClr val="accent1"/>
-          </a:fillRef>
-          <a:effectRef idx="2">
-            <a:schemeClr val="accent1"/>
-          </a:effectRef>
-          <a:fontRef idx="minor">
-            <a:schemeClr val="lt1"/>
-          </a:fontRef>
-        </p:style>
-        <p:txBody>
-          <a:bodyPr rtlCol="0" anchor="ctr"/>
-          <a:lstStyle/>
-          <a:p>
-            <a:pPr algn="ctr"/>
-          </a:p>
-        </p:txBody>
-      </p:sp>
-      <p:sp>
-        <p:nvSpPr>
-          <p:cNvPr id="81" name="TextBox 80"/>
-          <p:cNvSpPr txBox="1"/>
-          <p:nvPr/>
-        </p:nvSpPr>
-        <p:spPr>
-          <a:xfrm>
-            <a:off x="4937760" y="5047488"/>
-            <a:ext cx="777240" cy="201168"/>
-          </a:xfrm>
-          <a:prstGeom prst="rect">
-            <a:avLst/>
-          </a:prstGeom>
-          <a:noFill/>
-        </p:spPr>
-        <p:txBody>
-          <a:bodyPr wrap="square" lIns="45720" rIns="45720" anchor="ctr">
-            <a:spAutoFit/>
-          </a:bodyPr>
-          <a:lstStyle/>
-          <a:p>
-            <a:pPr algn="ctr"/>
-            <a:r>
-              <a:rPr sz="900" b="1">
-                <a:solidFill>
-                  <a:srgbClr val="FFFFFF"/>
-                </a:solidFill>
-                <a:latin typeface="Calibri"/>
-              </a:rPr>
-              <a:t>Unéal</a:t>
-            </a:r>
-          </a:p>
-        </p:txBody>
-      </p:sp>
-      <p:sp>
-        <p:nvSpPr>
-          <p:cNvPr id="82" name="TextBox 81"/>
-          <p:cNvSpPr txBox="1"/>
-          <p:nvPr/>
-        </p:nvSpPr>
-        <p:spPr>
-          <a:xfrm>
-            <a:off x="7498079" y="4983480"/>
-            <a:ext cx="2651760" cy="329184"/>
-          </a:xfrm>
-          <a:prstGeom prst="rect">
-            <a:avLst/>
-          </a:prstGeom>
-          <a:noFill/>
-        </p:spPr>
-        <p:txBody>
-          <a:bodyPr wrap="square" lIns="45720" rIns="45720" anchor="ctr">
-            <a:spAutoFit/>
-          </a:bodyPr>
-          <a:lstStyle/>
-          <a:p>
-            <a:pPr algn="l"/>
-            <a:r>
-              <a:rPr sz="1000" b="0">
-                <a:solidFill>
-                  <a:srgbClr val="666666"/>
-                </a:solidFill>
-                <a:latin typeface="Calibri"/>
-              </a:rPr>
-              <a:t>AIRE SUR LA LYS</a:t>
-            </a:r>
-          </a:p>
-        </p:txBody>
-      </p:sp>
-      <p:sp>
-        <p:nvSpPr>
-          <p:cNvPr id="83" name="TextBox 82"/>
-          <p:cNvSpPr txBox="1"/>
-          <p:nvPr/>
-        </p:nvSpPr>
-        <p:spPr>
-          <a:xfrm>
-            <a:off x="10149840" y="4983480"/>
-            <a:ext cx="1188720" cy="329184"/>
-          </a:xfrm>
-          <a:prstGeom prst="rect">
-            <a:avLst/>
-          </a:prstGeom>
-          <a:noFill/>
-        </p:spPr>
-        <p:txBody>
-          <a:bodyPr wrap="square" lIns="45720" rIns="45720" anchor="ctr">
-            <a:spAutoFit/>
-          </a:bodyPr>
-          <a:lstStyle/>
-          <a:p>
-            <a:pPr algn="l"/>
-            <a:r>
-              <a:rPr sz="1000" b="0">
-                <a:solidFill>
-                  <a:srgbClr val="666666"/>
-                </a:solidFill>
-                <a:latin typeface="Calibri"/>
-              </a:rPr>
-              <a:t>1.52 km</a:t>
-            </a:r>
-          </a:p>
-        </p:txBody>
-      </p:sp>
-      <p:sp>
-        <p:nvSpPr>
-          <p:cNvPr id="84" name="TextBox 83"/>
-          <p:cNvSpPr txBox="1"/>
-          <p:nvPr/>
-        </p:nvSpPr>
-        <p:spPr>
-          <a:xfrm>
-            <a:off x="548640" y="5312664"/>
-            <a:ext cx="2560320" cy="329184"/>
-          </a:xfrm>
-          <a:prstGeom prst="rect">
-            <a:avLst/>
-          </a:prstGeom>
-          <a:noFill/>
-        </p:spPr>
-        <p:txBody>
-          <a:bodyPr wrap="square" lIns="45720" rIns="45720" anchor="ctr">
-            <a:spAutoFit/>
-          </a:bodyPr>
-          <a:lstStyle/>
-          <a:p>
-            <a:pPr algn="l"/>
-            <a:r>
-              <a:rPr sz="1100" b="1">
-                <a:solidFill>
-                  <a:srgbClr val="1A1A2E"/>
-                </a:solidFill>
-                <a:latin typeface="Calibri"/>
-              </a:rPr>
-              <a:t>LOOBERGHE</a:t>
-            </a:r>
-          </a:p>
-        </p:txBody>
-      </p:sp>
-      <p:sp>
-        <p:nvSpPr>
-          <p:cNvPr id="85" name="TextBox 84"/>
-          <p:cNvSpPr txBox="1"/>
-          <p:nvPr/>
-        </p:nvSpPr>
-        <p:spPr>
-          <a:xfrm>
-            <a:off x="3108960" y="5312664"/>
-            <a:ext cx="1737360" cy="329184"/>
-          </a:xfrm>
-          <a:prstGeom prst="rect">
-            <a:avLst/>
-          </a:prstGeom>
-          <a:noFill/>
-        </p:spPr>
-        <p:txBody>
-          <a:bodyPr wrap="square" lIns="45720" rIns="45720" anchor="ctr">
-            <a:spAutoFit/>
-          </a:bodyPr>
-          <a:lstStyle/>
-          <a:p>
-            <a:pPr algn="l"/>
-            <a:r>
-              <a:rPr sz="1100" b="0">
-                <a:solidFill>
-                  <a:srgbClr val="1A1A2E"/>
-                </a:solidFill>
-                <a:latin typeface="Calibri"/>
-              </a:rPr>
-              <a:t>3 914 t</a:t>
-            </a:r>
-          </a:p>
-        </p:txBody>
-      </p:sp>
-      <p:sp>
-        <p:nvSpPr>
-          <p:cNvPr id="86" name="Rounded Rectangle 85"/>
-          <p:cNvSpPr/>
-          <p:nvPr/>
-        </p:nvSpPr>
-        <p:spPr>
-          <a:xfrm>
-            <a:off x="4937760" y="5376672"/>
-            <a:ext cx="777240" cy="201168"/>
-          </a:xfrm>
-          <a:prstGeom prst="roundRect">
-            <a:avLst/>
-          </a:prstGeom>
-          <a:solidFill>
-            <a:srgbClr val="1F77B4"/>
-          </a:solidFill>
-          <a:ln>
-            <a:noFill/>
-          </a:ln>
-          <a:effectLst/>
-        </p:spPr>
-        <p:style>
-          <a:lnRef idx="1">
-            <a:schemeClr val="accent1"/>
-          </a:lnRef>
-          <a:fillRef idx="3">
-            <a:schemeClr val="accent1"/>
-          </a:fillRef>
-          <a:effectRef idx="2">
-            <a:schemeClr val="accent1"/>
-          </a:effectRef>
-          <a:fontRef idx="minor">
-            <a:schemeClr val="lt1"/>
-          </a:fontRef>
-        </p:style>
-        <p:txBody>
-          <a:bodyPr rtlCol="0" anchor="ctr"/>
-          <a:lstStyle/>
-          <a:p>
-            <a:pPr algn="ctr"/>
-          </a:p>
-        </p:txBody>
-      </p:sp>
-      <p:sp>
-        <p:nvSpPr>
-          <p:cNvPr id="87" name="TextBox 86"/>
-          <p:cNvSpPr txBox="1"/>
-          <p:nvPr/>
-        </p:nvSpPr>
-        <p:spPr>
-          <a:xfrm>
-            <a:off x="4937760" y="5376672"/>
-            <a:ext cx="777240" cy="201168"/>
-          </a:xfrm>
-          <a:prstGeom prst="rect">
-            <a:avLst/>
-          </a:prstGeom>
-          <a:noFill/>
-        </p:spPr>
-        <p:txBody>
-          <a:bodyPr wrap="square" lIns="45720" rIns="45720" anchor="ctr">
-            <a:spAutoFit/>
-          </a:bodyPr>
-          <a:lstStyle/>
-          <a:p>
-            <a:pPr algn="ctr"/>
-            <a:r>
-              <a:rPr sz="900" b="1">
-                <a:solidFill>
-                  <a:srgbClr val="FFFFFF"/>
-                </a:solidFill>
-                <a:latin typeface="Calibri"/>
-              </a:rPr>
-              <a:t>Ternoveo</a:t>
-            </a:r>
-          </a:p>
-        </p:txBody>
-      </p:sp>
-      <p:sp>
-        <p:nvSpPr>
-          <p:cNvPr id="88" name="TextBox 87"/>
-          <p:cNvSpPr txBox="1"/>
-          <p:nvPr/>
-        </p:nvSpPr>
-        <p:spPr>
-          <a:xfrm>
-            <a:off x="7498079" y="5312664"/>
-            <a:ext cx="2651760" cy="329184"/>
-          </a:xfrm>
-          <a:prstGeom prst="rect">
-            <a:avLst/>
-          </a:prstGeom>
-          <a:noFill/>
-        </p:spPr>
-        <p:txBody>
-          <a:bodyPr wrap="square" lIns="45720" rIns="45720" anchor="ctr">
-            <a:spAutoFit/>
-          </a:bodyPr>
-          <a:lstStyle/>
-          <a:p>
-            <a:pPr algn="l"/>
-            <a:r>
-              <a:rPr sz="1000" b="0">
-                <a:solidFill>
-                  <a:srgbClr val="666666"/>
-                </a:solidFill>
-                <a:latin typeface="Calibri"/>
-              </a:rPr>
-              <a:t>BIERNE</a:t>
-            </a:r>
-          </a:p>
-        </p:txBody>
-      </p:sp>
-      <p:sp>
-        <p:nvSpPr>
-          <p:cNvPr id="89" name="TextBox 88"/>
-          <p:cNvSpPr txBox="1"/>
-          <p:nvPr/>
-        </p:nvSpPr>
-        <p:spPr>
-          <a:xfrm>
-            <a:off x="10149840" y="5312664"/>
-            <a:ext cx="1188720" cy="329184"/>
-          </a:xfrm>
-          <a:prstGeom prst="rect">
-            <a:avLst/>
-          </a:prstGeom>
-          <a:noFill/>
-        </p:spPr>
-        <p:txBody>
-          <a:bodyPr wrap="square" lIns="45720" rIns="45720" anchor="ctr">
-            <a:spAutoFit/>
-          </a:bodyPr>
-          <a:lstStyle/>
-          <a:p>
-            <a:pPr algn="l"/>
-            <a:r>
-              <a:rPr sz="1000" b="0">
-                <a:solidFill>
-                  <a:srgbClr val="666666"/>
-                </a:solidFill>
-                <a:latin typeface="Calibri"/>
-              </a:rPr>
-              <a:t>0.92 km</a:t>
-            </a:r>
-          </a:p>
-        </p:txBody>
-      </p:sp>
-      <p:sp>
-        <p:nvSpPr>
-          <p:cNvPr id="90" name="Rectangle 89"/>
-          <p:cNvSpPr/>
-          <p:nvPr/>
-        </p:nvSpPr>
-        <p:spPr>
-          <a:xfrm>
-            <a:off x="457200" y="5641848"/>
-            <a:ext cx="11277295" cy="329184"/>
-          </a:xfrm>
-          <a:prstGeom prst="rect">
-            <a:avLst/>
-          </a:prstGeom>
-          <a:solidFill>
-            <a:srgbClr val="F4F4F6"/>
-          </a:solidFill>
-          <a:ln>
-            <a:noFill/>
-          </a:ln>
-          <a:effectLst/>
-        </p:spPr>
-        <p:style>
-          <a:lnRef idx="1">
-            <a:schemeClr val="accent1"/>
-          </a:lnRef>
-          <a:fillRef idx="3">
-            <a:schemeClr val="accent1"/>
-          </a:fillRef>
-          <a:effectRef idx="2">
-            <a:schemeClr val="accent1"/>
-          </a:effectRef>
-          <a:fontRef idx="minor">
-            <a:schemeClr val="lt1"/>
-          </a:fontRef>
-        </p:style>
-        <p:txBody>
-          <a:bodyPr rtlCol="0" anchor="ctr"/>
-          <a:lstStyle/>
-          <a:p>
-            <a:pPr algn="ctr"/>
-          </a:p>
-        </p:txBody>
-      </p:sp>
-      <p:sp>
-        <p:nvSpPr>
-          <p:cNvPr id="91" name="TextBox 90"/>
-          <p:cNvSpPr txBox="1"/>
-          <p:nvPr/>
-        </p:nvSpPr>
-        <p:spPr>
-          <a:xfrm>
-            <a:off x="548640" y="5641848"/>
-            <a:ext cx="2560320" cy="329184"/>
-          </a:xfrm>
-          <a:prstGeom prst="rect">
-            <a:avLst/>
-          </a:prstGeom>
-          <a:noFill/>
-        </p:spPr>
-        <p:txBody>
-          <a:bodyPr wrap="square" lIns="45720" rIns="45720" anchor="ctr">
-            <a:spAutoFit/>
-          </a:bodyPr>
-          <a:lstStyle/>
-          <a:p>
-            <a:pPr algn="l"/>
-            <a:r>
-              <a:rPr sz="1100" b="1">
-                <a:solidFill>
-                  <a:srgbClr val="1A1A2E"/>
-                </a:solidFill>
-                <a:latin typeface="Calibri"/>
-              </a:rPr>
-              <a:t>OYE PLAGE</a:t>
-            </a:r>
-          </a:p>
-        </p:txBody>
-      </p:sp>
-      <p:sp>
-        <p:nvSpPr>
-          <p:cNvPr id="92" name="TextBox 91"/>
-          <p:cNvSpPr txBox="1"/>
-          <p:nvPr/>
-        </p:nvSpPr>
-        <p:spPr>
-          <a:xfrm>
-            <a:off x="3108960" y="5641848"/>
-            <a:ext cx="1737360" cy="329184"/>
-          </a:xfrm>
-          <a:prstGeom prst="rect">
-            <a:avLst/>
-          </a:prstGeom>
-          <a:noFill/>
-        </p:spPr>
-        <p:txBody>
-          <a:bodyPr wrap="square" lIns="45720" rIns="45720" anchor="ctr">
-            <a:spAutoFit/>
-          </a:bodyPr>
-          <a:lstStyle/>
-          <a:p>
-            <a:pPr algn="l"/>
-            <a:r>
-              <a:rPr sz="1100" b="0">
-                <a:solidFill>
-                  <a:srgbClr val="1A1A2E"/>
-                </a:solidFill>
-                <a:latin typeface="Calibri"/>
-              </a:rPr>
-              <a:t>3 670 t</a:t>
-            </a:r>
-          </a:p>
-        </p:txBody>
-      </p:sp>
-      <p:sp>
-        <p:nvSpPr>
-          <p:cNvPr id="93" name="Rounded Rectangle 92"/>
-          <p:cNvSpPr/>
-          <p:nvPr/>
-        </p:nvSpPr>
-        <p:spPr>
-          <a:xfrm>
-            <a:off x="4937760" y="5705856"/>
-            <a:ext cx="777240" cy="201168"/>
-          </a:xfrm>
-          <a:prstGeom prst="roundRect">
-            <a:avLst/>
-          </a:prstGeom>
-          <a:solidFill>
-            <a:srgbClr val="1F77B4"/>
-          </a:solidFill>
-          <a:ln>
-            <a:noFill/>
-          </a:ln>
-          <a:effectLst/>
-        </p:spPr>
-        <p:style>
-          <a:lnRef idx="1">
-            <a:schemeClr val="accent1"/>
-          </a:lnRef>
-          <a:fillRef idx="3">
-            <a:schemeClr val="accent1"/>
-          </a:fillRef>
-          <a:effectRef idx="2">
-            <a:schemeClr val="accent1"/>
-          </a:effectRef>
-          <a:fontRef idx="minor">
-            <a:schemeClr val="lt1"/>
-          </a:fontRef>
-        </p:style>
-        <p:txBody>
-          <a:bodyPr rtlCol="0" anchor="ctr"/>
-          <a:lstStyle/>
-          <a:p>
-            <a:pPr algn="ctr"/>
-          </a:p>
-        </p:txBody>
-      </p:sp>
-      <p:sp>
-        <p:nvSpPr>
-          <p:cNvPr id="94" name="TextBox 93"/>
-          <p:cNvSpPr txBox="1"/>
-          <p:nvPr/>
-        </p:nvSpPr>
-        <p:spPr>
-          <a:xfrm>
-            <a:off x="4937760" y="5705856"/>
-            <a:ext cx="777240" cy="201168"/>
-          </a:xfrm>
-          <a:prstGeom prst="rect">
-            <a:avLst/>
-          </a:prstGeom>
-          <a:noFill/>
-        </p:spPr>
-        <p:txBody>
-          <a:bodyPr wrap="square" lIns="45720" rIns="45720" anchor="ctr">
-            <a:spAutoFit/>
-          </a:bodyPr>
-          <a:lstStyle/>
-          <a:p>
-            <a:pPr algn="ctr"/>
-            <a:r>
-              <a:rPr sz="900" b="1">
-                <a:solidFill>
-                  <a:srgbClr val="FFFFFF"/>
-                </a:solidFill>
-                <a:latin typeface="Calibri"/>
-              </a:rPr>
-              <a:t>Ternoveo</a:t>
-            </a:r>
-          </a:p>
-        </p:txBody>
-      </p:sp>
-      <p:sp>
-        <p:nvSpPr>
-          <p:cNvPr id="95" name="TextBox 94"/>
-          <p:cNvSpPr txBox="1"/>
-          <p:nvPr/>
-        </p:nvSpPr>
-        <p:spPr>
-          <a:xfrm>
-            <a:off x="7498079" y="5641848"/>
-            <a:ext cx="2651760" cy="329184"/>
-          </a:xfrm>
-          <a:prstGeom prst="rect">
-            <a:avLst/>
-          </a:prstGeom>
-          <a:noFill/>
-        </p:spPr>
-        <p:txBody>
-          <a:bodyPr wrap="square" lIns="45720" rIns="45720" anchor="ctr">
-            <a:spAutoFit/>
-          </a:bodyPr>
-          <a:lstStyle/>
-          <a:p>
-            <a:pPr algn="l"/>
-            <a:r>
-              <a:rPr sz="1000" b="0">
-                <a:solidFill>
-                  <a:srgbClr val="666666"/>
-                </a:solidFill>
-                <a:latin typeface="Calibri"/>
-              </a:rPr>
-              <a:t>VIEILLE-EGLISE</a:t>
-            </a:r>
-          </a:p>
-        </p:txBody>
-      </p:sp>
-      <p:sp>
-        <p:nvSpPr>
-          <p:cNvPr id="96" name="TextBox 95"/>
-          <p:cNvSpPr txBox="1"/>
-          <p:nvPr/>
-        </p:nvSpPr>
-        <p:spPr>
-          <a:xfrm>
-            <a:off x="10149840" y="5641848"/>
-            <a:ext cx="1188720" cy="329184"/>
-          </a:xfrm>
-          <a:prstGeom prst="rect">
-            <a:avLst/>
-          </a:prstGeom>
-          <a:noFill/>
-        </p:spPr>
-        <p:txBody>
-          <a:bodyPr wrap="square" lIns="45720" rIns="45720" anchor="ctr">
-            <a:spAutoFit/>
-          </a:bodyPr>
-          <a:lstStyle/>
-          <a:p>
-            <a:pPr algn="l"/>
-            <a:r>
-              <a:rPr sz="1000" b="0">
-                <a:solidFill>
-                  <a:srgbClr val="666666"/>
-                </a:solidFill>
-                <a:latin typeface="Calibri"/>
-              </a:rPr>
-              <a:t>6.57 km</a:t>
-            </a:r>
-          </a:p>
-        </p:txBody>
-      </p:sp>
-      <p:sp>
-        <p:nvSpPr>
-          <p:cNvPr id="97" name="TextBox 96"/>
-          <p:cNvSpPr txBox="1"/>
-          <p:nvPr/>
-        </p:nvSpPr>
-        <p:spPr>
-          <a:xfrm>
-            <a:off x="548640" y="5971032"/>
-            <a:ext cx="2560320" cy="329184"/>
-          </a:xfrm>
-          <a:prstGeom prst="rect">
-            <a:avLst/>
-          </a:prstGeom>
-          <a:noFill/>
-        </p:spPr>
-        <p:txBody>
-          <a:bodyPr wrap="square" lIns="45720" rIns="45720" anchor="ctr">
-            <a:spAutoFit/>
-          </a:bodyPr>
-          <a:lstStyle/>
-          <a:p>
-            <a:pPr algn="l"/>
-            <a:r>
-              <a:rPr sz="1100" b="1">
-                <a:solidFill>
-                  <a:srgbClr val="1A1A2E"/>
-                </a:solidFill>
-                <a:latin typeface="Calibri"/>
-              </a:rPr>
-              <a:t>GONNEHEM</a:t>
-            </a:r>
-          </a:p>
-        </p:txBody>
-      </p:sp>
-      <p:sp>
-        <p:nvSpPr>
-          <p:cNvPr id="98" name="TextBox 97"/>
-          <p:cNvSpPr txBox="1"/>
-          <p:nvPr/>
-        </p:nvSpPr>
-        <p:spPr>
-          <a:xfrm>
-            <a:off x="3108960" y="5971032"/>
-            <a:ext cx="1737360" cy="329184"/>
-          </a:xfrm>
-          <a:prstGeom prst="rect">
-            <a:avLst/>
-          </a:prstGeom>
-          <a:noFill/>
-        </p:spPr>
-        <p:txBody>
-          <a:bodyPr wrap="square" lIns="45720" rIns="45720" anchor="ctr">
-            <a:spAutoFit/>
-          </a:bodyPr>
-          <a:lstStyle/>
-          <a:p>
-            <a:pPr algn="l"/>
-            <a:r>
-              <a:rPr sz="1100" b="0">
-                <a:solidFill>
-                  <a:srgbClr val="1A1A2E"/>
-                </a:solidFill>
-                <a:latin typeface="Calibri"/>
-              </a:rPr>
-              <a:t>1 875 t</a:t>
-            </a:r>
-          </a:p>
-        </p:txBody>
-      </p:sp>
-      <p:sp>
-        <p:nvSpPr>
-          <p:cNvPr id="99" name="Rounded Rectangle 98"/>
-          <p:cNvSpPr/>
-          <p:nvPr/>
-        </p:nvSpPr>
-        <p:spPr>
-          <a:xfrm>
-            <a:off x="4937760" y="6035040"/>
-            <a:ext cx="777240" cy="201168"/>
-          </a:xfrm>
-          <a:prstGeom prst="roundRect">
-            <a:avLst/>
-          </a:prstGeom>
-          <a:solidFill>
-            <a:srgbClr val="9C27B0"/>
-          </a:solidFill>
-          <a:ln>
-            <a:noFill/>
-          </a:ln>
-          <a:effectLst/>
-        </p:spPr>
-        <p:style>
-          <a:lnRef idx="1">
-            <a:schemeClr val="accent1"/>
-          </a:lnRef>
-          <a:fillRef idx="3">
-            <a:schemeClr val="accent1"/>
-          </a:fillRef>
-          <a:effectRef idx="2">
-            <a:schemeClr val="accent1"/>
-          </a:effectRef>
-          <a:fontRef idx="minor">
-            <a:schemeClr val="lt1"/>
-          </a:fontRef>
-        </p:style>
-        <p:txBody>
-          <a:bodyPr rtlCol="0" anchor="ctr"/>
-          <a:lstStyle/>
-          <a:p>
-            <a:pPr algn="ctr"/>
-          </a:p>
-        </p:txBody>
-      </p:sp>
-      <p:sp>
-        <p:nvSpPr>
-          <p:cNvPr id="100" name="TextBox 99"/>
-          <p:cNvSpPr txBox="1"/>
-          <p:nvPr/>
-        </p:nvSpPr>
-        <p:spPr>
-          <a:xfrm>
-            <a:off x="4937760" y="6035040"/>
-            <a:ext cx="777240" cy="201168"/>
-          </a:xfrm>
-          <a:prstGeom prst="rect">
-            <a:avLst/>
-          </a:prstGeom>
-          <a:noFill/>
-        </p:spPr>
-        <p:txBody>
-          <a:bodyPr wrap="square" lIns="45720" rIns="45720" anchor="ctr">
-            <a:spAutoFit/>
-          </a:bodyPr>
-          <a:lstStyle/>
-          <a:p>
-            <a:pPr algn="ctr"/>
-            <a:r>
-              <a:rPr sz="900" b="1">
-                <a:solidFill>
-                  <a:srgbClr val="FFFFFF"/>
-                </a:solidFill>
-                <a:latin typeface="Calibri"/>
-              </a:rPr>
-              <a:t>U + T</a:t>
-            </a:r>
-          </a:p>
-        </p:txBody>
-      </p:sp>
-      <p:sp>
-        <p:nvSpPr>
-          <p:cNvPr id="101" name="TextBox 100"/>
-          <p:cNvSpPr txBox="1"/>
-          <p:nvPr/>
-        </p:nvSpPr>
-        <p:spPr>
-          <a:xfrm>
-            <a:off x="7498079" y="5971032"/>
-            <a:ext cx="2651760" cy="329184"/>
-          </a:xfrm>
-          <a:prstGeom prst="rect">
-            <a:avLst/>
-          </a:prstGeom>
-          <a:noFill/>
-        </p:spPr>
-        <p:txBody>
-          <a:bodyPr wrap="square" lIns="45720" rIns="45720" anchor="ctr">
-            <a:spAutoFit/>
-          </a:bodyPr>
-          <a:lstStyle/>
-          <a:p>
-            <a:pPr algn="l"/>
-            <a:r>
-              <a:rPr sz="1000" b="0">
-                <a:solidFill>
-                  <a:srgbClr val="666666"/>
-                </a:solidFill>
-                <a:latin typeface="Calibri"/>
-              </a:rPr>
-              <a:t>ESSARS / BUSNES</a:t>
-            </a:r>
-          </a:p>
-        </p:txBody>
-      </p:sp>
-      <p:sp>
-        <p:nvSpPr>
-          <p:cNvPr id="102" name="TextBox 101"/>
-          <p:cNvSpPr txBox="1"/>
-          <p:nvPr/>
-        </p:nvSpPr>
-        <p:spPr>
-          <a:xfrm>
-            <a:off x="10149840" y="5971032"/>
-            <a:ext cx="1188720" cy="329184"/>
-          </a:xfrm>
-          <a:prstGeom prst="rect">
-            <a:avLst/>
-          </a:prstGeom>
-          <a:noFill/>
-        </p:spPr>
-        <p:txBody>
-          <a:bodyPr wrap="square" lIns="45720" rIns="45720" anchor="ctr">
-            <a:spAutoFit/>
-          </a:bodyPr>
-          <a:lstStyle/>
-          <a:p>
-            <a:pPr algn="l"/>
-            <a:r>
-              <a:rPr sz="1000" b="0">
-                <a:solidFill>
-                  <a:srgbClr val="666666"/>
-                </a:solidFill>
-                <a:latin typeface="Calibri"/>
-              </a:rPr>
-              <a:t>4.55 / 5.19 km</a:t>
-            </a:r>
-          </a:p>
-        </p:txBody>
-      </p:sp>
-      <p:sp>
-        <p:nvSpPr>
-          <p:cNvPr id="103" name="Rectangle 102"/>
-          <p:cNvSpPr/>
-          <p:nvPr/>
-        </p:nvSpPr>
-        <p:spPr>
-          <a:xfrm>
-            <a:off x="457200" y="6300216"/>
-            <a:ext cx="11277295" cy="329184"/>
-          </a:xfrm>
-          <a:prstGeom prst="rect">
-            <a:avLst/>
-          </a:prstGeom>
-          <a:solidFill>
-            <a:srgbClr val="F4F4F6"/>
-          </a:solidFill>
-          <a:ln>
-            <a:noFill/>
-          </a:ln>
-          <a:effectLst/>
-        </p:spPr>
-        <p:style>
-          <a:lnRef idx="1">
-            <a:schemeClr val="accent1"/>
-          </a:lnRef>
-          <a:fillRef idx="3">
-            <a:schemeClr val="accent1"/>
-          </a:fillRef>
-          <a:effectRef idx="2">
-            <a:schemeClr val="accent1"/>
-          </a:effectRef>
-          <a:fontRef idx="minor">
-            <a:schemeClr val="lt1"/>
-          </a:fontRef>
-        </p:style>
-        <p:txBody>
-          <a:bodyPr rtlCol="0" anchor="ctr"/>
-          <a:lstStyle/>
-          <a:p>
-            <a:pPr algn="ctr"/>
-          </a:p>
-        </p:txBody>
-      </p:sp>
-      <p:sp>
-        <p:nvSpPr>
-          <p:cNvPr id="104" name="TextBox 103"/>
-          <p:cNvSpPr txBox="1"/>
-          <p:nvPr/>
-        </p:nvSpPr>
-        <p:spPr>
-          <a:xfrm>
-            <a:off x="548640" y="6300216"/>
-            <a:ext cx="2560320" cy="329184"/>
-          </a:xfrm>
-          <a:prstGeom prst="rect">
-            <a:avLst/>
-          </a:prstGeom>
-          <a:noFill/>
-        </p:spPr>
-        <p:txBody>
-          <a:bodyPr wrap="square" lIns="45720" rIns="45720" anchor="ctr">
-            <a:spAutoFit/>
-          </a:bodyPr>
-          <a:lstStyle/>
-          <a:p>
-            <a:pPr algn="l"/>
-            <a:r>
-              <a:rPr sz="1100" b="1">
-                <a:solidFill>
-                  <a:srgbClr val="1A1A2E"/>
-                </a:solidFill>
-                <a:latin typeface="Calibri"/>
-              </a:rPr>
-              <a:t>FLEURBAIX</a:t>
-            </a:r>
-          </a:p>
-        </p:txBody>
-      </p:sp>
-      <p:sp>
-        <p:nvSpPr>
-          <p:cNvPr id="105" name="TextBox 104"/>
-          <p:cNvSpPr txBox="1"/>
-          <p:nvPr/>
-        </p:nvSpPr>
-        <p:spPr>
-          <a:xfrm>
-            <a:off x="3108960" y="6300216"/>
-            <a:ext cx="1737360" cy="329184"/>
-          </a:xfrm>
-          <a:prstGeom prst="rect">
-            <a:avLst/>
-          </a:prstGeom>
-          <a:noFill/>
-        </p:spPr>
-        <p:txBody>
-          <a:bodyPr wrap="square" lIns="45720" rIns="45720" anchor="ctr">
-            <a:spAutoFit/>
-          </a:bodyPr>
-          <a:lstStyle/>
-          <a:p>
-            <a:pPr algn="l"/>
-            <a:r>
-              <a:rPr sz="1100" b="0">
-                <a:solidFill>
-                  <a:srgbClr val="1A1A2E"/>
-                </a:solidFill>
-                <a:latin typeface="Calibri"/>
-              </a:rPr>
-              <a:t>1 773 t</a:t>
-            </a:r>
-          </a:p>
-        </p:txBody>
-      </p:sp>
-      <p:sp>
-        <p:nvSpPr>
-          <p:cNvPr id="106" name="Rounded Rectangle 105"/>
-          <p:cNvSpPr/>
+          <p:cNvPr id="107" name="TextBox 106"/>
+          <p:cNvSpPr txBox="1"/>
           <p:nvPr/>
         </p:nvSpPr>
         <p:spPr>
@@ -10440,50 +10484,6 @@
             <a:off x="4937760" y="6364224"/>
             <a:ext cx="777240" cy="201168"/>
           </a:xfrm>
-          <a:prstGeom prst="roundRect">
-            <a:avLst/>
-          </a:prstGeom>
-          <a:solidFill>
-            <a:srgbClr val="2CA02C"/>
-          </a:solidFill>
-          <a:ln>
-            <a:noFill/>
-          </a:ln>
-          <a:effectLst/>
-        </p:spPr>
-        <p:style>
-          <a:lnRef idx="1">
-            <a:schemeClr val="accent1"/>
-          </a:lnRef>
-          <a:fillRef idx="3">
-            <a:schemeClr val="accent1"/>
-          </a:fillRef>
-          <a:effectRef idx="2">
-            <a:schemeClr val="accent1"/>
-          </a:effectRef>
-          <a:fontRef idx="minor">
-            <a:schemeClr val="lt1"/>
-          </a:fontRef>
-        </p:style>
-        <p:txBody>
-          <a:bodyPr rtlCol="0" anchor="ctr"/>
-          <a:lstStyle/>
-          <a:p>
-            <a:pPr algn="ctr"/>
-          </a:p>
-        </p:txBody>
-      </p:sp>
-      <p:sp>
-        <p:nvSpPr>
-          <p:cNvPr id="107" name="TextBox 106"/>
-          <p:cNvSpPr txBox="1"/>
-          <p:nvPr/>
-        </p:nvSpPr>
-        <p:spPr>
-          <a:xfrm>
-            <a:off x="4937760" y="6364224"/>
-            <a:ext cx="777240" cy="201168"/>
-          </a:xfrm>
           <a:prstGeom prst="rect">
             <a:avLst/>
           </a:prstGeom>
@@ -10538,7 +10538,7 @@
                 </a:solidFill>
                 <a:latin typeface="Calibri"/>
               </a:rPr>
-              <a:t>LAVENTIE</a:t>
+              <a:t>CAFFIERS</a:t>
             </a:r>
           </a:p>
         </p:txBody>
@@ -10573,7 +10573,7 @@
                 </a:solidFill>
                 <a:latin typeface="Calibri"/>
               </a:rPr>
-              <a:t>6.42 km</a:t>
+              <a:t>4.06 km</a:t>
             </a:r>
           </a:p>
         </p:txBody>
@@ -11111,7 +11111,7 @@
                 </a:solidFill>
                 <a:latin typeface="Calibri"/>
               </a:rPr>
-              <a:t>3 sites Noriap sont à &lt;7 km d'un Unéal ET d'un Ternoveo. Décision la plus rapide à instruire.</a:t>
+              <a:t>8 sites Noriap sont à &lt;7 km d'un Unéal ET d'un Ternoveo. Décision la plus rapide à instruire.</a:t>
             </a:r>
           </a:p>
         </p:txBody>
@@ -11453,7 +11453,7 @@
                 </a:solidFill>
                 <a:latin typeface="Calibri"/>
               </a:rPr>
-              <a:t>38 silos avec GPS précis sur ~125 actifs. Demande directe ou enrichissement par adresses.</a:t>
+              <a:t>143 silos avec GPS précis sur ~125 actifs. Demande directe ou enrichissement par adresses.</a:t>
             </a:r>
           </a:p>
         </p:txBody>
